--- a/generated_ppts/Introduction to AI.pptx
+++ b/generated_ppts/Introduction to AI.pptx
@@ -55,6 +55,7 @@
     <p:sldId id="303" r:id="rId54"/>
     <p:sldId id="304" r:id="rId55"/>
     <p:sldId id="305" r:id="rId56"/>
+    <p:sldId id="306" r:id="rId57"/>
   </p:sldIdLst>
   <p:sldSz cx="9144000" cy="6858000" type="screen4x3"/>
   <p:notesSz cx="6858000" cy="9144000"/>
@@ -3153,7 +3154,7 @@
           <a:lstStyle/>
           <a:p>
             <a:r>
-              <a:t>Welcome to Introduction to AI</a:t>
+              <a:t>Unit Introduction: Welcome to Introduction to AI</a:t>
             </a:r>
           </a:p>
         </p:txBody>
@@ -3174,32 +3175,32 @@
           <a:lstStyle/>
           <a:p>
             <a:r>
-              <a:t>This unit provides a foundational understanding of Artificial Intelligence, its principles, and methodologies.</a:t>
-            </a:r>
-          </a:p>
-          <a:p>
-            <a:r>
-              <a:t>We will explore the historical journey of AI, from its philosophical roots to contemporary advancements.</a:t>
-            </a:r>
-          </a:p>
-          <a:p>
-            <a:r>
-              <a:t>Key concepts include defining AI, understanding intelligent agents, and mastering problem-solving techniques.</a:t>
-            </a:r>
-          </a:p>
-          <a:p>
-            <a:r>
-              <a:t>The course covers fundamental search algorithms, specifically uninformed search strategies like BFS and DFS.</a:t>
-            </a:r>
-          </a:p>
-          <a:p>
-            <a:r>
-              <a:t>Our goal is to equip you with the theoretical knowledge necessary to appreciate and apply AI principles.</a:t>
-            </a:r>
-          </a:p>
-          <a:p>
-            <a:r>
-              <a:t>Prepare for an engaging journey into the fascinating world of artificial intelligence!</a:t>
+              <a:t>Welcome to 'Introduction to Artificial Intelligence', a foundational course exploring the principles and techniques behind intelligent systems.</a:t>
+            </a:r>
+          </a:p>
+          <a:p>
+            <a:r>
+              <a:t>Artificial Intelligence (AI) is a rapidly evolving field that aims to create machines capable of performing tasks that typically require human intelligence.</a:t>
+            </a:r>
+          </a:p>
+          <a:p>
+            <a:r>
+              <a:t>This unit will cover core concepts from the definition and history of AI to advanced search algorithms and intelligent agents.</a:t>
+            </a:r>
+          </a:p>
+          <a:p>
+            <a:r>
+              <a:t>Understanding these fundamentals is crucial for appreciating the capabilities and limitations of current AI technologies and for future developments.</a:t>
+            </a:r>
+          </a:p>
+          <a:p>
+            <a:r>
+              <a:t>Throughout this course, we will combine theoretical understanding with practical insights into how AI is applied in real-world scenarios.</a:t>
+            </a:r>
+          </a:p>
+          <a:p>
+            <a:r>
+              <a:t>Our journey will equip you with a strong conceptual framework for further study in specialized AI domains like machine learning, robotics, and natural language processing.</a:t>
             </a:r>
           </a:p>
         </p:txBody>
@@ -3238,7 +3239,7 @@
           <a:lstStyle/>
           <a:p>
             <a:r>
-              <a:t>Natural Language Processing (NLP)</a:t>
+              <a:t>Topic 2: Robotics and Autonomous Systems</a:t>
             </a:r>
           </a:p>
         </p:txBody>
@@ -3259,32 +3260,32 @@
           <a:lstStyle/>
           <a:p>
             <a:r>
-              <a:t>NLP enables computers to understand, interpret, and generate human language, bridging the gap between human communication and computer processing.</a:t>
-            </a:r>
-          </a:p>
-          <a:p>
-            <a:r>
-              <a:t>Applications include machine translation (e.g., Google Translate), allowing real-time communication across language barriers.</a:t>
-            </a:r>
-          </a:p>
-          <a:p>
-            <a:r>
-              <a:t>Chatbots and virtual assistants (e.g., Siri, Alexa) utilize NLP for conversational AI, providing information and performing tasks based on spoken or typed commands.</a:t>
-            </a:r>
-          </a:p>
-          <a:p>
-            <a:r>
-              <a:t>Sentiment analysis helps businesses gauge public opinion and customer satisfaction by analyzing text data from social media, reviews, and news.</a:t>
-            </a:r>
-          </a:p>
-          <a:p>
-            <a:r>
-              <a:t>Text summarization, information extraction, and spam detection are further examples, streamlining information management and improving digital security.</a:t>
-            </a:r>
-          </a:p>
-          <a:p>
-            <a:r>
-              <a:t>Recent advancements with large language models (LLMs) have pushed the boundaries of what's possible in language generation and comprehension.</a:t>
+              <a:t>Robotics integrates AI with mechanical engineering to create intelligent machines capable of sensing, planning, and acting in the physical world.</a:t>
+            </a:r>
+          </a:p>
+          <a:p>
+            <a:r>
+              <a:t>Autonomous systems, a broader category, include self-driving cars, drones, and robotic assistants that can operate with minimal or no human intervention.</a:t>
+            </a:r>
+          </a:p>
+          <a:p>
+            <a:r>
+              <a:t>Industrial robots (e.g., robotic arms on assembly lines) perform repetitive tasks with high precision and speed, enhancing manufacturing efficiency.</a:t>
+            </a:r>
+          </a:p>
+          <a:p>
+            <a:r>
+              <a:t>Service robots in healthcare (e.g., surgical robots like da Vinci), logistics (warehouse robots), and homes (robot vacuums) provide assistance and automation.</a:t>
+            </a:r>
+          </a:p>
+          <a:p>
+            <a:r>
+              <a:t>The challenge in robotics lies in developing robust perception, navigation, manipulation, and human-robot interaction capabilities.</a:t>
+            </a:r>
+          </a:p>
+          <a:p>
+            <a:r>
+              <a:t>Ethical considerations around job displacement, safety, and accountability are increasingly important as autonomous systems become more prevalent.</a:t>
             </a:r>
           </a:p>
         </p:txBody>
@@ -3323,7 +3324,7 @@
           <a:lstStyle/>
           <a:p>
             <a:r>
-              <a:t>Computer Vision</a:t>
+              <a:t>Topic 2: AI in Healthcare, Finance, and Other Industries</a:t>
             </a:r>
           </a:p>
         </p:txBody>
@@ -3344,32 +3345,32 @@
           <a:lstStyle/>
           <a:p>
             <a:r>
-              <a:t>Computer Vision grants machines the ability to 'see' and interpret visual information from images and videos.</a:t>
-            </a:r>
-          </a:p>
-          <a:p>
-            <a:r>
-              <a:t>Facial recognition is used for security, authentication, and identification in various applications, from unlocking phones to surveillance.</a:t>
-            </a:r>
-          </a:p>
-          <a:p>
-            <a:r>
-              <a:t>Autonomous driving heavily relies on computer vision for perceiving road conditions, obstacles, traffic signs, and other vehicles.</a:t>
-            </a:r>
-          </a:p>
-          <a:p>
-            <a:r>
-              <a:t>Medical imaging analysis (e.g., X-rays, MRIs) uses AI to detect anomalies, assist in diagnoses, and identify cancerous cells with high accuracy.</a:t>
-            </a:r>
-          </a:p>
-          <a:p>
-            <a:r>
-              <a:t>Object detection and recognition are fundamental for inventory management, quality control in manufacturing, and content moderation.</a:t>
-            </a:r>
-          </a:p>
-          <a:p>
-            <a:r>
-              <a:t>Augmented Reality (AR) and Virtual Reality (VR) applications leverage computer vision to understand real-world environments and overlay digital content.</a:t>
+              <a:t>In healthcare, AI assists in drug discovery and development, personalized medicine (tailoring treatments to individual patients), and predictive analytics for disease outbreaks.</a:t>
+            </a:r>
+          </a:p>
+          <a:p>
+            <a:r>
+              <a:t>AI-powered diagnostic tools analyze medical data to provide early and accurate diagnoses, augmenting the capabilities of medical professionals.</a:t>
+            </a:r>
+          </a:p>
+          <a:p>
+            <a:r>
+              <a:t>Financial services utilize AI for algorithmic trading, fraud detection, credit scoring, and personalized financial advice (robo-advisors).</a:t>
+            </a:r>
+          </a:p>
+          <a:p>
+            <a:r>
+              <a:t>AI's ability to process and analyze vast datasets helps identify suspicious patterns in transactions, significantly reducing financial crime.</a:t>
+            </a:r>
+          </a:p>
+          <a:p>
+            <a:r>
+              <a:t>In retail, AI drives personalized recommendations, optimized supply chains, and dynamic pricing strategies.</a:t>
+            </a:r>
+          </a:p>
+          <a:p>
+            <a:r>
+              <a:t>Other diverse applications include climate modeling, personalized education, smart city infrastructure management, and creative arts (AI-generated music and art).</a:t>
             </a:r>
           </a:p>
         </p:txBody>
@@ -3408,7 +3409,7 @@
           <a:lstStyle/>
           <a:p>
             <a:r>
-              <a:t>Robotics and Automation</a:t>
+              <a:t>Topic 3: Intelligent Agents - Defining an Agent</a:t>
             </a:r>
           </a:p>
         </p:txBody>
@@ -3429,32 +3430,32 @@
           <a:lstStyle/>
           <a:p>
             <a:r>
-              <a:t>AI enhances robotics by enabling robots to perceive their environment, learn, make decisions, and interact autonomously.</a:t>
-            </a:r>
-          </a:p>
-          <a:p>
-            <a:r>
-              <a:t>Industrial robots perform repetitive, high-precision tasks in manufacturing, assembly lines, and logistics, significantly increasing efficiency and safety.</a:t>
-            </a:r>
-          </a:p>
-          <a:p>
-            <a:r>
-              <a:t>Service robots are increasingly deployed in healthcare (e.g., surgical assistants, elderly care), hospitality (e.g., cleaning robots), and domestic settings (e.g., robot vacuums).</a:t>
-            </a:r>
-          </a:p>
-          <a:p>
-            <a:r>
-              <a:t>Autonomous drones (UAVs) are used for surveillance, delivery, agriculture (crop monitoring), and infrastructure inspection.</a:t>
-            </a:r>
-          </a:p>
-          <a:p>
-            <a:r>
-              <a:t>Humanoid robots are being developed for more complex interactions, research, and applications requiring human-like dexterity and communication.</a:t>
-            </a:r>
-          </a:p>
-          <a:p>
-            <a:r>
-              <a:t>The integration of AI allows robots to adapt to unstructured environments and perform more complex, cognitive tasks.</a:t>
+              <a:t>An intelligent agent is anything that can perceive its environment through sensors and act upon that environment through actuators.</a:t>
+            </a:r>
+          </a:p>
+          <a:p>
+            <a:r>
+              <a:t>This definition is general enough to encompass humans, robots, software programs, and even thermostat systems.</a:t>
+            </a:r>
+          </a:p>
+          <a:p>
+            <a:r>
+              <a:t>The agent's 'percepts' are its inputs from the environment, and its 'actions' are its outputs that change the environment.</a:t>
+            </a:r>
+          </a:p>
+          <a:p>
+            <a:r>
+              <a:t>A rational agent is one that acts in a way that is expected to maximize its performance measure, given the percept sequence it has observed so far.</a:t>
+            </a:r>
+          </a:p>
+          <a:p>
+            <a:r>
+              <a:t>The concept of an intelligent agent provides a unified framework for studying AI problems, focusing on the agent's interaction with its environment.</a:t>
+            </a:r>
+          </a:p>
+          <a:p>
+            <a:r>
+              <a:t>The agent function maps percept sequences to actions: f: P* → A, determining what action an agent should take based on its history of observations.</a:t>
             </a:r>
           </a:p>
         </p:txBody>
@@ -3493,7 +3494,7 @@
           <a:lstStyle/>
           <a:p>
             <a:r>
-              <a:t>Decision Support and Expert Systems</a:t>
+              <a:t>Topic 3: PEAS Description for Agents</a:t>
             </a:r>
           </a:p>
         </p:txBody>
@@ -3514,32 +3515,37 @@
           <a:lstStyle/>
           <a:p>
             <a:r>
-              <a:t>AI-powered decision support systems assist humans in making informed choices by analyzing vast amounts of data and providing recommendations.</a:t>
-            </a:r>
-          </a:p>
-          <a:p>
-            <a:r>
-              <a:t>Expert systems, an early AI success, codified human expert knowledge into rules to solve problems in specialized domains, such as medical diagnosis (MYCIN).</a:t>
-            </a:r>
-          </a:p>
-          <a:p>
-            <a:r>
-              <a:t>Financial AI applications include algorithmic trading, fraud detection, credit scoring, and personalized financial advice.</a:t>
-            </a:r>
-          </a:p>
-          <a:p>
-            <a:r>
-              <a:t>Recommender systems (e.g., Netflix, Amazon) analyze user preferences and behaviors to suggest products, movies, or content, enhancing user experience.</a:t>
-            </a:r>
-          </a:p>
-          <a:p>
-            <a:r>
-              <a:t>In healthcare, AI aids in drug discovery, personalized medicine, and predicting patient outcomes based on clinical data.</a:t>
-            </a:r>
-          </a:p>
-          <a:p>
-            <a:r>
-              <a:t>These systems augment human intelligence, improve the speed and accuracy of decision-making, and optimize operational processes.</a:t>
+              <a:t>To fully specify an intelligent agent's task, it is useful to define its Performance measure, Environment, Actuators, and Sensors (PEAS).</a:t>
+            </a:r>
+          </a:p>
+          <a:p>
+            <a:r>
+              <a:t>**Performance Measure**: The criteria for success, defining what makes the agent's actions desirable (e.g., vacuum cleaner: dirt cleaned, power consumed).</a:t>
+            </a:r>
+          </a:p>
+          <a:p>
+            <a:r>
+              <a:t>**Environment**: The world in which the agent operates (e.g., vacuum cleaner: room layout, dirt distribution, furniture).</a:t>
+            </a:r>
+          </a:p>
+          <a:p>
+            <a:r>
+              <a:t>**Actuators**: The mechanisms by which the agent interacts with the environment (e.g., vacuum cleaner: wheels, brushes, suction mechanism).</a:t>
+            </a:r>
+          </a:p>
+          <a:p>
+            <a:r>
+              <a:t>**Sensors**: The mechanisms by which the agent perceives its environment (e.g., vacuum cleaner: dirt detector, bump sensor, location sensor).</a:t>
+            </a:r>
+          </a:p>
+          <a:p>
+            <a:r>
+              <a:t>A well-defined PEAS description is crucial for designing and evaluating an effective intelligent agent for a specific problem.</a:t>
+            </a:r>
+          </a:p>
+          <a:p>
+            <a:r>
+              <a:t>For example, for a self-driving car: P (safety, trip duration, comfort), E (roads, traffic, pedestrians, weather), A (steering, accelerator, brake, horn), S (cameras, radar, lidar, GPS).</a:t>
             </a:r>
           </a:p>
         </p:txBody>
@@ -3578,7 +3584,7 @@
           <a:lstStyle/>
           <a:p>
             <a:r>
-              <a:t>Topic 3: Intelligent Agents</a:t>
+              <a:t>Topic 3: Types of Environments</a:t>
             </a:r>
           </a:p>
         </p:txBody>
@@ -3599,32 +3605,37 @@
           <a:lstStyle/>
           <a:p>
             <a:r>
-              <a:t>This section introduces the concept of an intelligent agent, which serves as a fundamental building block in modern AI.</a:t>
-            </a:r>
-          </a:p>
-          <a:p>
-            <a:r>
-              <a:t>We will define what constitutes an intelligent agent and explore its key components: percepts, actions, and environments.</a:t>
-            </a:r>
-          </a:p>
-          <a:p>
-            <a:r>
-              <a:t>Understanding different types of agents and their characteristics is crucial for designing effective AI systems.</a:t>
-            </a:r>
-          </a:p>
-          <a:p>
-            <a:r>
-              <a:t>The objective is to provide a framework for thinking about how AI systems interact with and act upon their surroundings.</a:t>
-            </a:r>
-          </a:p>
-          <a:p>
-            <a:r>
-              <a:t>We'll cover different agent architectures, from simple reflex agents to more complex utility-based agents.</a:t>
-            </a:r>
-          </a:p>
-          <a:p>
-            <a:r>
-              <a:t>This topic lays the groundwork for understanding how AI systems perceive, reason, and make decisions.</a:t>
+              <a:t>Environments can be characterized by several properties that influence agent design:</a:t>
+            </a:r>
+          </a:p>
+          <a:p>
+            <a:r>
+              <a:t>**Fully Observable vs. Partially Observable**: If an agent's sensors give it access to the complete state of the environment at all times, it's fully observable; otherwise, partially observable.</a:t>
+            </a:r>
+          </a:p>
+          <a:p>
+            <a:r>
+              <a:t>**Single Agent vs. Multiagent**: Whether the agent is the only entity acting in the environment, or if other agents (human or AI) are also present.</a:t>
+            </a:r>
+          </a:p>
+          <a:p>
+            <a:r>
+              <a:t>**Deterministic vs. Stochastic**: If the next state of the environment is completely determined by the current state and the agent's action (deterministic), or if randomness is involved (stochastic).</a:t>
+            </a:r>
+          </a:p>
+          <a:p>
+            <a:r>
+              <a:t>**Episodic vs. Sequential**: In episodic environments, each action decision is independent of previous actions; in sequential, current actions affect future decisions.</a:t>
+            </a:r>
+          </a:p>
+          <a:p>
+            <a:r>
+              <a:t>**Static vs. Dynamic**: A static environment does not change while the agent is deliberating; a dynamic one does. Semi-dynamic if environment changes but performance score doesn't.</a:t>
+            </a:r>
+          </a:p>
+          <a:p>
+            <a:r>
+              <a:t>**Discrete vs. Continuous**: Refers to the finite or infinite number of percepts, actions, and states of the environment.</a:t>
             </a:r>
           </a:p>
         </p:txBody>
@@ -3663,7 +3674,7 @@
           <a:lstStyle/>
           <a:p>
             <a:r>
-              <a:t>What are Intelligent Agents?</a:t>
+              <a:t>Topic 3: Agent Programs and Architectures</a:t>
             </a:r>
           </a:p>
         </p:txBody>
@@ -3684,32 +3695,37 @@
           <a:lstStyle/>
           <a:p>
             <a:r>
-              <a:t>An intelligent agent is anything that perceives its environment through sensors and acts upon that environment through effectors.</a:t>
-            </a:r>
-          </a:p>
-          <a:p>
-            <a:r>
-              <a:t>The agent function maps percept sequences to actions; mathematically, f: P* -&gt; A, where P is the set of percepts and A is the set of actions.</a:t>
-            </a:r>
-          </a:p>
-          <a:p>
-            <a:r>
-              <a:t>The agent program is the concrete implementation of the agent function, running on the agent's architecture.</a:t>
-            </a:r>
-          </a:p>
-          <a:p>
-            <a:r>
-              <a:t>Key components include sensors (input), effectors (output), and the agent itself, which contains the 'intelligence'.</a:t>
-            </a:r>
-          </a:p>
-          <a:p>
-            <a:r>
-              <a:t>The goal of a rational agent is to act in a way that maximizes its expected performance measure, given the percept sequence to date.</a:t>
-            </a:r>
-          </a:p>
-          <a:p>
-            <a:r>
-              <a:t>Examples range from simple thermostat agents to complex autonomous vehicles and virtual assistants.</a:t>
+              <a:t>An agent program is the implementation of the agent function, taking current percepts as input and returning an action.</a:t>
+            </a:r>
+          </a:p>
+          <a:p>
+            <a:r>
+              <a:t>Agent programs combine with the hardware (sensors and actuators) to form an agent architecture.</a:t>
+            </a:r>
+          </a:p>
+          <a:p>
+            <a:r>
+              <a:t>**Simple Reflex Agents**: Select actions based only on the current percept, ignoring history (e.g., if dirt then suck). Effective for fully observable, deterministic environments.</a:t>
+            </a:r>
+          </a:p>
+          <a:p>
+            <a:r>
+              <a:t>**Model-Based Reflex Agents**: Maintain an internal state to keep track of the unobserved aspects of the environment, using a 'model' of how the world evolves and how actions affect it.</a:t>
+            </a:r>
+          </a:p>
+          <a:p>
+            <a:r>
+              <a:t>**Goal-Based Agents**: Expand on model-based agents by having explicit goals they try to achieve, choosing actions that lead to the goal state.</a:t>
+            </a:r>
+          </a:p>
+          <a:p>
+            <a:r>
+              <a:t>**Utility-Based Agents**: When multiple goals or paths to a goal exist, these agents choose actions that maximize a utility function, reflecting the agent's preference among states.</a:t>
+            </a:r>
+          </a:p>
+          <a:p>
+            <a:r>
+              <a:t>**Learning Agents**: These agents improve their performance over time by learning from experience, modifying their agent program based on feedback.</a:t>
             </a:r>
           </a:p>
         </p:txBody>
@@ -3748,7 +3764,7 @@
           <a:lstStyle/>
           <a:p>
             <a:r>
-              <a:t>Agent Environments (PEAS Description)</a:t>
+              <a:t>Topic 3: Rationality and Autonomy</a:t>
             </a:r>
           </a:p>
         </p:txBody>
@@ -3769,42 +3785,32 @@
           <a:lstStyle/>
           <a:p>
             <a:r>
-              <a:t>To design a rational agent, we first need to characterize its 'Performance measure, Environment, Actuators, and Sensors' (PEAS).</a:t>
-            </a:r>
-          </a:p>
-          <a:p>
-            <a:r>
-              <a:t>The environment can be categorized by several key properties:</a:t>
-            </a:r>
-          </a:p>
-          <a:p>
-            <a:r>
-              <a:t>1. Fully observable vs. Partially observable: Does the agent have access to the complete state of the environment?</a:t>
-            </a:r>
-          </a:p>
-          <a:p>
-            <a:r>
-              <a:t>2. Single-agent vs. Multi-agent: Is there one agent or multiple agents interacting?</a:t>
-            </a:r>
-          </a:p>
-          <a:p>
-            <a:r>
-              <a:t>3. Deterministic vs. Stochastic: Is the next state fully determined by the current state and action, or does randomness play a role?</a:t>
-            </a:r>
-          </a:p>
-          <a:p>
-            <a:r>
-              <a:t>4. Episodic vs. Sequential: Is the agent's experience divided into atomic episodes, or do current actions affect future decisions?</a:t>
-            </a:r>
-          </a:p>
-          <a:p>
-            <a:r>
-              <a:t>5. Static vs. Dynamic: Does the environment change while the agent is deliberating?</a:t>
-            </a:r>
-          </a:p>
-          <a:p>
-            <a:r>
-              <a:t>6. Discrete vs. Continuous: Are states, percepts, and actions distinct or continuous values?</a:t>
+              <a:t>**Rationality**: An agent is rational if it acts to achieve the best possible outcome (or the best expected outcome in uncertain situations), given its current percept sequence and knowledge.</a:t>
+            </a:r>
+          </a:p>
+          <a:p>
+            <a:r>
+              <a:t>Rationality implies having a performance measure, prior knowledge of the environment, and knowing the actions it can perform.</a:t>
+            </a:r>
+          </a:p>
+          <a:p>
+            <a:r>
+              <a:t>It's crucial to distinguish rationality from omniscience; an omniscient agent knows the actual outcome of its actions, but a rational agent only acts based on its available knowledge.</a:t>
+            </a:r>
+          </a:p>
+          <a:p>
+            <a:r>
+              <a:t>**Autonomy**: An agent is autonomous to the extent that its behavior is determined by its own experience rather than by pre-programmed knowledge.</a:t>
+            </a:r>
+          </a:p>
+          <a:p>
+            <a:r>
+              <a:t>A completely autonomous agent can learn to compensate for incomplete or incorrect prior knowledge by adapting its behavior.</a:t>
+            </a:r>
+          </a:p>
+          <a:p>
+            <a:r>
+              <a:t>Achieving autonomy often involves a learning component within the agent architecture, allowing it to modify its internal models and decision-making processes over time.</a:t>
             </a:r>
           </a:p>
         </p:txBody>
@@ -3843,7 +3849,7 @@
           <a:lstStyle/>
           <a:p>
             <a:r>
-              <a:t>Simple Reflex Agents</a:t>
+              <a:t>Topic 4: AI Problem Solving - Problem Formulation</a:t>
             </a:r>
           </a:p>
         </p:txBody>
@@ -3864,32 +3870,32 @@
           <a:lstStyle/>
           <a:p>
             <a:r>
-              <a:t>Simple reflex agents select actions based on the current percept only, ignoring the percept history.</a:t>
-            </a:r>
-          </a:p>
-          <a:p>
-            <a:r>
-              <a:t>They operate on a 'condition-action rule' (if-then rule), directly mapping percepts to actions.</a:t>
-            </a:r>
-          </a:p>
-          <a:p>
-            <a:r>
-              <a:t>These agents are straightforward to implement and are suitable for environments that are fully observable and deterministic.</a:t>
-            </a:r>
-          </a:p>
-          <a:p>
-            <a:r>
-              <a:t>Example: A vacuum-cleaner agent that cleans if dirt is present, or moves if not, based solely on the current square's status.</a:t>
-            </a:r>
-          </a:p>
-          <a:p>
-            <a:r>
-              <a:t>Limitations: They are effective only if the correct decision can be made based on the current percept alone; they cannot handle partial observability.</a:t>
-            </a:r>
-          </a:p>
-          <a:p>
-            <a:r>
-              <a:t>They lack memory or internal state, meaning they cannot learn or adapt to changing conditions beyond their predefined rules.</a:t>
+              <a:t>Many AI tasks can be framed as search problems, where an agent needs to find a sequence of actions to reach a desired goal state.</a:t>
+            </a:r>
+          </a:p>
+          <a:p>
+            <a:r>
+              <a:t>**Goal Formulation**: The first step in problem-solving, defining the set of target situations the agent wants to achieve. (e.g., for a robot: 'reach location X').</a:t>
+            </a:r>
+          </a:p>
+          <a:p>
+            <a:r>
+              <a:t>**Problem Formulation**: Deciding what actions and states to consider, often involving abstraction to simplify the real world into a manageable representation.</a:t>
+            </a:r>
+          </a:p>
+          <a:p>
+            <a:r>
+              <a:t>A well-formulated problem includes an initial state, a set of possible actions, a transition model (describing effects of actions), a goal test, and a path cost function.</a:t>
+            </a:r>
+          </a:p>
+          <a:p>
+            <a:r>
+              <a:t>The quality of a solution is often measured by the path cost, which could be the number of steps, time taken, or resources consumed.</a:t>
+            </a:r>
+          </a:p>
+          <a:p>
+            <a:r>
+              <a:t>Example: In the '8-puzzle', the goal is a specific configuration of tiles, and actions are moving a blank tile up, down, left, or right.</a:t>
             </a:r>
           </a:p>
         </p:txBody>
@@ -3928,7 +3934,7 @@
           <a:lstStyle/>
           <a:p>
             <a:r>
-              <a:t>Model-Based Reflex Agents</a:t>
+              <a:t>Topic 4: Components of a Problem</a:t>
             </a:r>
           </a:p>
         </p:txBody>
@@ -3949,32 +3955,37 @@
           <a:lstStyle/>
           <a:p>
             <a:r>
-              <a:t>Model-based reflex agents maintain an internal state that depends on the percept history, allowing them to handle partially observable environments.</a:t>
-            </a:r>
-          </a:p>
-          <a:p>
-            <a:r>
-              <a:t>They use an internal 'model' of the world to keep track of unobserved aspects of the environment's state.</a:t>
-            </a:r>
-          </a:p>
-          <a:p>
-            <a:r>
-              <a:t>The model typically consists of two parts: 'how the world evolves independently of the agent' and 'how the agent's actions affect the world'.</a:t>
-            </a:r>
-          </a:p>
-          <a:p>
-            <a:r>
-              <a:t>By combining the current percept with the internal state, the agent can infer the true (or closer to true) state of the world.</a:t>
-            </a:r>
-          </a:p>
-          <a:p>
-            <a:r>
-              <a:t>Example: A car navigation system uses sensors (percepts) but also a map (internal model) to determine its current location and plan routes.</a:t>
-            </a:r>
-          </a:p>
-          <a:p>
-            <a:r>
-              <a:t>This agent type is more capable than simple reflex agents but still operates reactively based on rules applied to the current (inferred) state.</a:t>
+              <a:t>A formal definition of a search problem consists of five key components:</a:t>
+            </a:r>
+          </a:p>
+          <a:p>
+            <a:r>
+              <a:t>**Initial State**: The state from which the agent starts its search (e.g., initial configuration of the 8-puzzle).</a:t>
+            </a:r>
+          </a:p>
+          <a:p>
+            <a:r>
+              <a:t>**Actions (or Successor Function)**: A description of the possible actions available to the agent in any given state. Returns a set of (action, next_state) pairs.</a:t>
+            </a:r>
+          </a:p>
+          <a:p>
+            <a:r>
+              <a:t>**Transition Model**: Defines what state results from performing a given action in a given state. Formally, RESULT(s, a) = s'.</a:t>
+            </a:r>
+          </a:p>
+          <a:p>
+            <a:r>
+              <a:t>**Goal Test**: A function that determines whether a given state is a goal state. Can be an explicit set of goal states or an abstract property.</a:t>
+            </a:r>
+          </a:p>
+          <a:p>
+            <a:r>
+              <a:t>**Path Cost Function**: A function that assigns a numerical cost to a path. It is often the sum of individual step costs (e.g., g(n) = cost to reach node n).</a:t>
+            </a:r>
+          </a:p>
+          <a:p>
+            <a:r>
+              <a:t>The solution to a search problem is a sequence of actions that leads from the initial state to a goal state, minimizing the path cost.</a:t>
             </a:r>
           </a:p>
         </p:txBody>
@@ -4013,7 +4024,7 @@
           <a:lstStyle/>
           <a:p>
             <a:r>
-              <a:t>Goal-Based Agents</a:t>
+              <a:t>Topic 4: Search Space and Solution</a:t>
             </a:r>
           </a:p>
         </p:txBody>
@@ -4034,32 +4045,32 @@
           <a:lstStyle/>
           <a:p>
             <a:r>
-              <a:t>Goal-based agents extend model-based agents by using goal information to select actions that lead to a desirable future state.</a:t>
-            </a:r>
-          </a:p>
-          <a:p>
-            <a:r>
-              <a:t>Instead of just applying rules, they consider sequences of actions that will ultimately achieve their specified goals.</a:t>
-            </a:r>
-          </a:p>
-          <a:p>
-            <a:r>
-              <a:t>This often involves search and planning algorithms to find the optimal path or sequence of actions to reach the goal.</a:t>
-            </a:r>
-          </a:p>
-          <a:p>
-            <a:r>
-              <a:t>Example: An autonomous taxi agent's goal might be to reach a destination; it needs to plan a route through the city.</a:t>
-            </a:r>
-          </a:p>
-          <a:p>
-            <a:r>
-              <a:t>They need to know not only how the world works but also what states are desirable.</a:t>
-            </a:r>
-          </a:p>
-          <a:p>
-            <a:r>
-              <a:t>Goal-based agents are more flexible and adaptable than reflex agents, as their behavior can change based on different goals.</a:t>
+              <a:t>The **search space** is an abstract representation of all possible states and transitions in a problem, typically visualized as a graph or tree.</a:t>
+            </a:r>
+          </a:p>
+          <a:p>
+            <a:r>
+              <a:t>Nodes in the graph represent states, and edges represent actions or transitions between states.</a:t>
+            </a:r>
+          </a:p>
+          <a:p>
+            <a:r>
+              <a:t>A **path** in the search space is a sequence of states connected by actions, starting from the initial state.</a:t>
+            </a:r>
+          </a:p>
+          <a:p>
+            <a:r>
+              <a:t>A **solution** to a search problem is a path from the initial state to a goal state. Optimal solutions are paths with the lowest path cost.</a:t>
+            </a:r>
+          </a:p>
+          <a:p>
+            <a:r>
+              <a:t>The process of problem-solving involves systematically exploring the search space to find a path to the goal.</a:t>
+            </a:r>
+          </a:p>
+          <a:p>
+            <a:r>
+              <a:t>The complexity of the search space can vary dramatically; some problems have small, finite spaces, while others are infinite or very large.</a:t>
             </a:r>
           </a:p>
         </p:txBody>
@@ -4098,7 +4109,7 @@
           <a:lstStyle/>
           <a:p>
             <a:r>
-              <a:t>Topic 1: Definition and History of AI</a:t>
+              <a:t>Topic 1: Definition and History of AI - What is AI?</a:t>
             </a:r>
           </a:p>
         </p:txBody>
@@ -4119,32 +4130,32 @@
           <a:lstStyle/>
           <a:p>
             <a:r>
-              <a:t>This section introduces the core definitions of Artificial Intelligence and traces its evolution over decades.</a:t>
-            </a:r>
-          </a:p>
-          <a:p>
-            <a:r>
-              <a:t>We will differentiate between various perspectives on AI, including thinking humanly, acting humanly, thinking rationally, and acting rationally.</a:t>
-            </a:r>
-          </a:p>
-          <a:p>
-            <a:r>
-              <a:t>Understanding the historical context is crucial for appreciating the current state and future directions of AI.</a:t>
-            </a:r>
-          </a:p>
-          <a:p>
-            <a:r>
-              <a:t>We'll examine pivotal moments, key figures, and the recurring cycles of enthusiasm and skepticism known as 'AI winters'.</a:t>
-            </a:r>
-          </a:p>
-          <a:p>
-            <a:r>
-              <a:t>The objective is to establish a clear conceptual framework for the rest of the course.</a:t>
-            </a:r>
-          </a:p>
-          <a:p>
-            <a:r>
-              <a:t>By the end, you should be able to articulate what AI is and how it has developed.</a:t>
+              <a:t>Artificial Intelligence (AI) is broadly defined as the science and engineering of making intelligent machines, especially intelligent computer programs (John McCarthy, 1956).</a:t>
+            </a:r>
+          </a:p>
+          <a:p>
+            <a:r>
+              <a:t>It encompasses various capabilities: reasoning, knowledge representation, planning, learning, natural language processing (NLP), perception, and the ability to move and manipulate objects.</a:t>
+            </a:r>
+          </a:p>
+          <a:p>
+            <a:r>
+              <a:t>Key approaches to defining AI include 'thinking humanly' (cognitive modeling), 'acting humanly' (Turing Test), 'thinking rationally' (laws of thought), and 'acting rationally' (rational agent approach).</a:t>
+            </a:r>
+          </a:p>
+          <a:p>
+            <a:r>
+              <a:t>The 'acting rationally' approach is predominant in modern AI, focusing on building agents that maximize expected utility given their perceptions.</a:t>
+            </a:r>
+          </a:p>
+          <a:p>
+            <a:r>
+              <a:t>AI systems aim to simulate or exceed human cognitive functions, allowing machines to solve complex problems and adapt to new situations.</a:t>
+            </a:r>
+          </a:p>
+          <a:p>
+            <a:r>
+              <a:t>The ultimate goal of AI remains a subject of philosophical debate, ranging from creating narrow task-specific intelligence to achieving artificial general intelligence (AGI).</a:t>
             </a:r>
           </a:p>
         </p:txBody>
@@ -4183,7 +4194,7 @@
           <a:lstStyle/>
           <a:p>
             <a:r>
-              <a:t>Utility-Based Agents</a:t>
+              <a:t>Topic 4: Search Algorithms: General Framework</a:t>
             </a:r>
           </a:p>
         </p:txBody>
@@ -4204,32 +4215,32 @@
           <a:lstStyle/>
           <a:p>
             <a:r>
-              <a:t>Utility-based agents are the most sophisticated type, making decisions that maximize their 'utility' or 'happiness', especially when facing multiple goals or uncertain outcomes.</a:t>
-            </a:r>
-          </a:p>
-          <a:p>
-            <a:r>
-              <a:t>A utility function maps a state (or a sequence of states) to a real number, representing the desirability of that state.</a:t>
-            </a:r>
-          </a:p>
-          <a:p>
-            <a:r>
-              <a:t>These agents choose the action that leads to the highest expected utility, considering the probabilities of various outcomes.</a:t>
-            </a:r>
-          </a:p>
-          <a:p>
-            <a:r>
-              <a:t>They are essential for environments where goals are conflicting or where there are trade-offs between different objectives.</a:t>
-            </a:r>
-          </a:p>
-          <a:p>
-            <a:r>
-              <a:t>Example: An autonomous driving agent might weigh safety (high utility) against arrival time (medium utility) and fuel efficiency (lower utility).</a:t>
-            </a:r>
-          </a:p>
-          <a:p>
-            <a:r>
-              <a:t>Utility-based agents are particularly important in complex, dynamic, and uncertain environments, often employing decision theory.</a:t>
+              <a:t>Search algorithms are methods for systematically exploring the search space to find a solution path.</a:t>
+            </a:r>
+          </a:p>
+          <a:p>
+            <a:r>
+              <a:t>Most search algorithms operate by maintaining a **fringe** (or 'open list') of states that have been generated but not yet expanded.</a:t>
+            </a:r>
+          </a:p>
+          <a:p>
+            <a:r>
+              <a:t>**Expansion** involves generating all successor states from a chosen node in the fringe.</a:t>
+            </a:r>
+          </a:p>
+          <a:p>
+            <a:r>
+              <a:t>A **closed list** (or 'explored set') is typically used to keep track of already expanded states to avoid redundant work and cycles.</a:t>
+            </a:r>
+          </a:p>
+          <a:p>
+            <a:r>
+              <a:t>The choice of which node to expand next from the fringe determines the specific search strategy (e.g., breadth-first, depth-first, A*).</a:t>
+            </a:r>
+          </a:p>
+          <a:p>
+            <a:r>
+              <a:t>Search algorithms are evaluated based on completeness (guaranteed to find a solution if one exists), optimality (guaranteed to find the best solution), time complexity, and space complexity.</a:t>
             </a:r>
           </a:p>
         </p:txBody>
@@ -4268,7 +4279,7 @@
           <a:lstStyle/>
           <a:p>
             <a:r>
-              <a:t>Topic 4: AI Problem Solving</a:t>
+              <a:t>Topic 4: Example: The 8-Puzzle Problem</a:t>
             </a:r>
           </a:p>
         </p:txBody>
@@ -4289,32 +4300,37 @@
           <a:lstStyle/>
           <a:p>
             <a:r>
-              <a:t>This section focuses on the fundamental approach of AI as problem-solving through search.</a:t>
-            </a:r>
-          </a:p>
-          <a:p>
-            <a:r>
-              <a:t>We will formalize problems by defining states, actions, and goal conditions, crucial for computational solutions.</a:t>
-            </a:r>
-          </a:p>
-          <a:p>
-            <a:r>
-              <a:t>Understanding the components of a well-defined problem is the first step towards designing intelligent agents that can find solutions.</a:t>
-            </a:r>
-          </a:p>
-          <a:p>
-            <a:r>
-              <a:t>The objective is to introduce the concept of abstract problem formulation, separating the problem from its specific domain.</a:t>
-            </a:r>
-          </a:p>
-          <a:p>
-            <a:r>
-              <a:t>We'll look at 'toy problems' that illustrate these concepts and briefly touch upon real-world scenarios.</a:t>
-            </a:r>
-          </a:p>
-          <a:p>
-            <a:r>
-              <a:t>This topic underpins much of classical AI, leading directly into search algorithms.</a:t>
+              <a:t>The 8-puzzle is a classic AI search problem consisting of a 3x3 grid with 8 numbered tiles and one blank space.</a:t>
+            </a:r>
+          </a:p>
+          <a:p>
+            <a:r>
+              <a:t>**States**: A configuration of the tiles on the board. There are 9!/2 = 181,440 reachable states.</a:t>
+            </a:r>
+          </a:p>
+          <a:p>
+            <a:r>
+              <a:t>**Initial State**: Any specific configuration of the tiles.</a:t>
+            </a:r>
+          </a:p>
+          <a:p>
+            <a:r>
+              <a:t>**Actions**: Move the blank tile up, down, left, or right into an adjacent tile's position. This implicitly moves the adjacent tile into the blank's position.</a:t>
+            </a:r>
+          </a:p>
+          <a:p>
+            <a:r>
+              <a:t>**Goal Test**: Check if the current state matches the desired goal configuration (e.g., tiles in numerical order).</a:t>
+            </a:r>
+          </a:p>
+          <a:p>
+            <a:r>
+              <a:t>**Path Cost**: Usually 1 for each move, aiming to find the shortest sequence of moves.</a:t>
+            </a:r>
+          </a:p>
+          <a:p>
+            <a:r>
+              <a:t>This problem is small enough to demonstrate search algorithms effectively, yet complex enough to highlight the challenges of search.</a:t>
             </a:r>
           </a:p>
         </p:txBody>
@@ -4353,7 +4369,7 @@
           <a:lstStyle/>
           <a:p>
             <a:r>
-              <a:t>Introduction to AI Problem Solving</a:t>
+              <a:t>Topic 5: State Space Representation - Definition</a:t>
             </a:r>
           </a:p>
         </p:txBody>
@@ -4374,32 +4390,32 @@
           <a:lstStyle/>
           <a:p>
             <a:r>
-              <a:t>Many AI tasks can be framed as 'problem-solving search': finding a sequence of actions that transforms an initial state into a goal state.</a:t>
-            </a:r>
-          </a:p>
-          <a:p>
-            <a:r>
-              <a:t>This approach abstracts away the complexities of the real world into a simplified model, making it computationally tractable.</a:t>
-            </a:r>
-          </a:p>
-          <a:p>
-            <a:r>
-              <a:t>The process involves defining the problem precisely, exploring possible solutions, and evaluating their effectiveness.</a:t>
-            </a:r>
-          </a:p>
-          <a:p>
-            <a:r>
-              <a:t>Problem-solving agents are distinct from reflex agents as they involve deliberation, planning, and often exploration.</a:t>
-            </a:r>
-          </a:p>
-          <a:p>
-            <a:r>
-              <a:t>The core idea is to move through a state space by applying operators (actions) until a goal is reached.</a:t>
-            </a:r>
-          </a:p>
-          <a:p>
-            <a:r>
-              <a:t>This paradigm is foundational for tasks like pathfinding, game playing, and logistics.</a:t>
+              <a:t>A state space is a mathematical representation of a problem in terms of states and operators (actions).</a:t>
+            </a:r>
+          </a:p>
+          <a:p>
+            <a:r>
+              <a:t>It defines all possible configurations a problem can be in and the ways it can transition between these configurations.</a:t>
+            </a:r>
+          </a:p>
+          <a:p>
+            <a:r>
+              <a:t>Formally, a state space is a 4-tuple (S, A, T, s0) where S is the set of all possible states, A is the set of actions, T is the transition model, and s0 is the initial state.</a:t>
+            </a:r>
+          </a:p>
+          <a:p>
+            <a:r>
+              <a:t>States represent snapshots of the problem at a given moment, capturing all relevant information needed to decide on the next action.</a:t>
+            </a:r>
+          </a:p>
+          <a:p>
+            <a:r>
+              <a:t>The chosen representation of states significantly impacts the efficiency and feasibility of solving a problem.</a:t>
+            </a:r>
+          </a:p>
+          <a:p>
+            <a:r>
+              <a:t>For discrete problems, states are often represented symbolically (e.g., 'Agent at (x,y) with N items').</a:t>
             </a:r>
           </a:p>
         </p:txBody>
@@ -4438,7 +4454,7 @@
           <a:lstStyle/>
           <a:p>
             <a:r>
-              <a:t>Components of a Problem Formulation</a:t>
+              <a:t>Topic 5: Representing States</a:t>
             </a:r>
           </a:p>
         </p:txBody>
@@ -4459,37 +4475,32 @@
           <a:lstStyle/>
           <a:p>
             <a:r>
-              <a:t>A well-defined problem has four key components:</a:t>
-            </a:r>
-          </a:p>
-          <a:p>
-            <a:r>
-              <a:t>1. Initial State: The starting point of the agent, describing the situation before any actions are taken.</a:t>
-            </a:r>
-          </a:p>
-          <a:p>
-            <a:r>
-              <a:t>2. Actions (or Operators): A set of possible actions available to the agent. A 'successor function' describes the state resulting from each action.</a:t>
-            </a:r>
-          </a:p>
-          <a:p>
-            <a:r>
-              <a:t>3. Goal Test: A way to determine if a given state is a goal state, indicating that the problem has been solved.</a:t>
-            </a:r>
-          </a:p>
-          <a:p>
-            <a:r>
-              <a:t>4. Path Cost: A function that assigns a numerical cost to each path (sequence of actions). The aim is often to find a path with the lowest cost.</a:t>
-            </a:r>
-          </a:p>
-          <a:p>
-            <a:r>
-              <a:t>The solution to a problem is a sequence of actions that leads from the initial state to a goal state.</a:t>
-            </a:r>
-          </a:p>
-          <a:p>
-            <a:r>
-              <a:t>This formalization allows us to use general search algorithms, rather than custom solutions for each problem.</a:t>
+              <a:t>The choice of state representation is critical; it must be complete (capture all necessary information) and concise (avoid irrelevant details).</a:t>
+            </a:r>
+          </a:p>
+          <a:p>
+            <a:r>
+              <a:t>For the 8-puzzle, a state can be represented as a 3x3 array or a list of 9 numbers indicating tile positions.</a:t>
+            </a:r>
+          </a:p>
+          <a:p>
+            <a:r>
+              <a:t>In a robot navigation problem, a state might include the robot's (x,y) coordinates, orientation, and battery level.</a:t>
+            </a:r>
+          </a:p>
+          <a:p>
+            <a:r>
+              <a:t>For a game like chess, a state involves the positions of all pieces on the board, whose turn it is, and castling/en passant rights.</a:t>
+            </a:r>
+          </a:p>
+          <a:p>
+            <a:r>
+              <a:t>Too granular a state representation leads to an enormous search space, while too abstract a representation might lose crucial information.</a:t>
+            </a:r>
+          </a:p>
+          <a:p>
+            <a:r>
+              <a:t>State features, often called state variables, are used to define the properties of a state uniquely.</a:t>
             </a:r>
           </a:p>
         </p:txBody>
@@ -4528,7 +4539,7 @@
           <a:lstStyle/>
           <a:p>
             <a:r>
-              <a:t>Search Problems and Search Trees</a:t>
+              <a:t>Topic 5: Operators (Actions) and Transitions</a:t>
             </a:r>
           </a:p>
         </p:txBody>
@@ -4549,32 +4560,32 @@
           <a:lstStyle/>
           <a:p>
             <a:r>
-              <a:t>Once a problem is formulated, a 'search problem' is created, which consists of finding a path from the initial state to a goal state.</a:t>
-            </a:r>
-          </a:p>
-          <a:p>
-            <a:r>
-              <a:t>The states and actions define a 'state space' graph where nodes are states and edges are actions.</a:t>
-            </a:r>
-          </a:p>
-          <a:p>
-            <a:r>
-              <a:t>During search, we often build a 'search tree', which is a systematic way to explore the state space.</a:t>
-            </a:r>
-          </a:p>
-          <a:p>
-            <a:r>
-              <a:t>The root of the search tree corresponds to the initial state; nodes are generated by applying actions to parent nodes.</a:t>
-            </a:r>
-          </a:p>
-          <a:p>
-            <a:r>
-              <a:t>A 'node' in the search tree typically contains the state, the parent node, the action that generated it, and the path cost from the initial state.</a:t>
-            </a:r>
-          </a:p>
-          <a:p>
-            <a:r>
-              <a:t>The challenge is to efficiently explore this tree to find a solution, avoiding redundant paths and infinite loops.</a:t>
+              <a:t>Operators (or actions) define the permissible transitions between states in the state space.</a:t>
+            </a:r>
+          </a:p>
+          <a:p>
+            <a:r>
+              <a:t>Each operator transforms one state into another, representing a legal move or action in the problem domain.</a:t>
+            </a:r>
+          </a:p>
+          <a:p>
+            <a:r>
+              <a:t>The **transition model** (or successor function) formally describes the outcome of applying an action to a state: `RESULT(s, a) = s'`</a:t>
+            </a:r>
+          </a:p>
+          <a:p>
+            <a:r>
+              <a:t>Operators often have associated costs, which contribute to the path cost function for evaluating solutions.</a:t>
+            </a:r>
+          </a:p>
+          <a:p>
+            <a:r>
+              <a:t>For example, in the Traveling Salesperson Problem, an operator might be 'travel from city A to city B'.</a:t>
+            </a:r>
+          </a:p>
+          <a:p>
+            <a:r>
+              <a:t>The set of available operators can vary depending on the current state (e.g., in a maze, you can only move into adjacent open cells).</a:t>
             </a:r>
           </a:p>
         </p:txBody>
@@ -4613,7 +4624,7 @@
           <a:lstStyle/>
           <a:p>
             <a:r>
-              <a:t>Toy Problems for Illustration</a:t>
+              <a:t>Topic 5: State Space Graphs and Trees</a:t>
             </a:r>
           </a:p>
         </p:txBody>
@@ -4634,37 +4645,32 @@
           <a:lstStyle/>
           <a:p>
             <a:r>
-              <a:t>Toy problems are simplified models used to illustrate core AI concepts and test algorithms, despite being abstractions of real-world complexity.</a:t>
-            </a:r>
-          </a:p>
-          <a:p>
-            <a:r>
-              <a:t>1. Vacuum World: A simple agent in two rooms, cleaning or moving, used to demonstrate simple reflex and model-based agents and state space search.</a:t>
-            </a:r>
-          </a:p>
-          <a:p>
-            <a:r>
-              <a:t>2. 8-Puzzle (or 15-Puzzle): Sliding tiles on a 3x3 (or 4x4) grid to reach a goal configuration. A classic test for search algorithms and heuristics.</a:t>
-            </a:r>
-          </a:p>
-          <a:p>
-            <a:r>
-              <a:t>3. Missionaries and Cannibals: Three missionaries and three cannibals on one side of a river, needing to cross with a boat, subject to the constraint that cannibals never outnumber missionaries on either bank.</a:t>
-            </a:r>
-          </a:p>
-          <a:p>
-            <a:r>
-              <a:t>4. Water Jug Problem: Given two jugs of different capacities, measure out a specific amount of water.</a:t>
-            </a:r>
-          </a:p>
-          <a:p>
-            <a:r>
-              <a:t>These problems, while simple, expose complexities related to state representation, action definition, and the combinatorial explosion of states.</a:t>
-            </a:r>
-          </a:p>
-          <a:p>
-            <a:r>
-              <a:t>They are invaluable for understanding the performance and limitations of various search strategies.</a:t>
+              <a:t>A state space can be visualized as a **graph**, where nodes are states and directed edges are actions connecting states.</a:t>
+            </a:r>
+          </a:p>
+          <a:p>
+            <a:r>
+              <a:t>When a search algorithm explores the state space, it implicitly constructs a **search tree**.</a:t>
+            </a:r>
+          </a:p>
+          <a:p>
+            <a:r>
+              <a:t>The root of the search tree is the initial state, and its children are states reachable from the root by one action.</a:t>
+            </a:r>
+          </a:p>
+          <a:p>
+            <a:r>
+              <a:t>Nodes in the search tree represent paths from the initial state to the current state, crucial for reconstructing the solution.</a:t>
+            </a:r>
+          </a:p>
+          <a:p>
+            <a:r>
+              <a:t>A graph representation is more memory-efficient if many paths lead to the same state (cycles are handled). A tree representation can have repeated states.</a:t>
+            </a:r>
+          </a:p>
+          <a:p>
+            <a:r>
+              <a:t>Algorithms often use a 'closed list' or 'explored set' to avoid processing duplicate states in a graph search, transforming the tree exploration into a graph traversal.</a:t>
             </a:r>
           </a:p>
         </p:txBody>
@@ -4703,7 +4709,7 @@
           <a:lstStyle/>
           <a:p>
             <a:r>
-              <a:t>Real-world AI Problem Solving</a:t>
+              <a:t>Topic 5: Challenges in State Space Representation</a:t>
             </a:r>
           </a:p>
         </p:txBody>
@@ -4724,37 +4730,32 @@
           <a:lstStyle/>
           <a:p>
             <a:r>
-              <a:t>Many real-world problems can be effectively framed and solved using AI search techniques, though often with greater scale and complexity.</a:t>
-            </a:r>
-          </a:p>
-          <a:p>
-            <a:r>
-              <a:t>1. Route Finding/Navigation: Finding the shortest or fastest path between two locations, considering traffic, road conditions, and various transport modes (e.g., GPS systems).</a:t>
-            </a:r>
-          </a:p>
-          <a:p>
-            <a:r>
-              <a:t>2. Traveling Salesperson Problem (TSP): Finding the shortest possible route that visits each city exactly once and returns to the origin city. Critically important for logistics and delivery.</a:t>
-            </a:r>
-          </a:p>
-          <a:p>
-            <a:r>
-              <a:t>3. Scheduling and Planning: Allocating resources and ordering tasks to achieve goals efficiently, used in airline scheduling, factory production, and project management.</a:t>
-            </a:r>
-          </a:p>
-          <a:p>
-            <a:r>
-              <a:t>4. Game Playing: AI agents develop strategies to play games like chess, Go, and poker, involving complex search spaces and adversarial reasoning.</a:t>
-            </a:r>
-          </a:p>
-          <a:p>
-            <a:r>
-              <a:t>5. Robot Motion Planning: Determining a sequence of movements for a robot to navigate from a start to a goal configuration while avoiding obstacles.</a:t>
-            </a:r>
-          </a:p>
-          <a:p>
-            <a:r>
-              <a:t>These problems often require more advanced search techniques, including informed search and optimization methods, due to their vast state spaces.</a:t>
+              <a:t>**State Explosion Problem**: Many real-world problems have an astronomically large number of possible states, making exhaustive search impractical.</a:t>
+            </a:r>
+          </a:p>
+          <a:p>
+            <a:r>
+              <a:t>This exponential growth of states with problem size is a major challenge in AI and highlights the need for efficient search strategies.</a:t>
+            </a:r>
+          </a:p>
+          <a:p>
+            <a:r>
+              <a:t>**Choice of Abstraction**: Deciding what level of detail to include in the state representation is crucial. Too much detail leads to explosion, too little leads to loss of information.</a:t>
+            </a:r>
+          </a:p>
+          <a:p>
+            <a:r>
+              <a:t>**Handling Uncertainty**: In stochastic environments, actions do not always lead to predictable outcomes, complicating state transitions and requiring probabilistic models.</a:t>
+            </a:r>
+          </a:p>
+          <a:p>
+            <a:r>
+              <a:t>**Dynamic Environments**: If the environment changes independently of the agent's actions, the state space itself can be dynamic, requiring replanning.</a:t>
+            </a:r>
+          </a:p>
+          <a:p>
+            <a:r>
+              <a:t>Effective state space representation is fundamental to designing solvable AI problems and impacts the performance of any subsequent search algorithm.</a:t>
             </a:r>
           </a:p>
         </p:txBody>
@@ -4793,7 +4794,7 @@
           <a:lstStyle/>
           <a:p>
             <a:r>
-              <a:t>Topic 5: State Space Representation</a:t>
+              <a:t>Topic 6: Uninformed Search - Introduction</a:t>
             </a:r>
           </a:p>
         </p:txBody>
@@ -4814,32 +4815,32 @@
           <a:lstStyle/>
           <a:p>
             <a:r>
-              <a:t>This section delves into the critical concept of state space representation, which is fundamental to AI problem solving.</a:t>
-            </a:r>
-          </a:p>
-          <a:p>
-            <a:r>
-              <a:t>We will formalize how problems are modeled as a graph of states and transitions, forming the basis for search algorithms.</a:t>
-            </a:r>
-          </a:p>
-          <a:p>
-            <a:r>
-              <a:t>Understanding how to represent states and actions is crucial for developing efficient search strategies.</a:t>
-            </a:r>
-          </a:p>
-          <a:p>
-            <a:r>
-              <a:t>The objective is to teach you how to translate real-world problems into a formal structure that can be processed by AI algorithms.</a:t>
-            </a:r>
-          </a:p>
-          <a:p>
-            <a:r>
-              <a:t>We'll cover the definition of state space, the role of operators, and the distinction between graph and tree representations.</a:t>
-            </a:r>
-          </a:p>
-          <a:p>
-            <a:r>
-              <a:t>This topic serves as the direct prerequisite for understanding and implementing search algorithms.</a:t>
+              <a:t>Uninformed search algorithms (also known as blind search) have no information about the 'goodness' of a state or how far it is from the goal.</a:t>
+            </a:r>
+          </a:p>
+          <a:p>
+            <a:r>
+              <a:t>They only know the difference between a goal state and a non-goal state, and the rules for generating successor states.</a:t>
+            </a:r>
+          </a:p>
+          <a:p>
+            <a:r>
+              <a:t>These algorithms systematically explore the search space, relying solely on the order in which states are generated and expanded.</a:t>
+            </a:r>
+          </a:p>
+          <a:p>
+            <a:r>
+              <a:t>They are general-purpose search methods that can be applied to any problem that can be formulated as a state-space search.</a:t>
+            </a:r>
+          </a:p>
+          <a:p>
+            <a:r>
+              <a:t>The primary uniformed search strategies include Breadth-First Search (BFS), Depth-First Search (DFS), Depth-Limited Search (DLS), Iterative Deepening Depth-First Search (IDDFS), and Uniform-Cost Search (UCS).</a:t>
+            </a:r>
+          </a:p>
+          <a:p>
+            <a:r>
+              <a:t>While simple to implement, their efficiency can be limited for large search spaces due to lack of heuristic guidance.</a:t>
             </a:r>
           </a:p>
         </p:txBody>
@@ -4878,7 +4879,7 @@
           <a:lstStyle/>
           <a:p>
             <a:r>
-              <a:t>What is State Space?</a:t>
+              <a:t>Topic 6: General Search Algorithm Framework</a:t>
             </a:r>
           </a:p>
         </p:txBody>
@@ -4899,32 +4900,57 @@
           <a:lstStyle/>
           <a:p>
             <a:r>
-              <a:t>A state space is a mathematical abstraction used in AI to represent all possible configurations or situations a problem solver can be in.</a:t>
-            </a:r>
-          </a:p>
-          <a:p>
-            <a:r>
-              <a:t>It's typically modeled as a graph where each node represents a unique state, and each edge represents a valid transition (action or operator) between states.</a:t>
-            </a:r>
-          </a:p>
-          <a:p>
-            <a:r>
-              <a:t>The initial state is the starting node, and one or more goal states are the target nodes within this graph.</a:t>
-            </a:r>
-          </a:p>
-          <a:p>
-            <a:r>
-              <a:t>The path from the initial state to a goal state corresponds to a sequence of actions that solves the problem.</a:t>
-            </a:r>
-          </a:p>
-          <a:p>
-            <a:r>
-              <a:t>The size and complexity of the state space directly impact the computational resources required to find a solution.</a:t>
-            </a:r>
-          </a:p>
-          <a:p>
-            <a:r>
-              <a:t>Effective state space representation is vital for the design of efficient search algorithms.</a:t>
+              <a:t>All uniformed search algorithms share a common framework:</a:t>
+            </a:r>
+          </a:p>
+          <a:p>
+            <a:r>
+              <a:t>Initialize an `open list` (or `fringe`) with the initial state.</a:t>
+            </a:r>
+          </a:p>
+          <a:p>
+            <a:r>
+              <a:t>Initialize a `closed list` (or `explored set`) as empty.</a:t>
+            </a:r>
+          </a:p>
+          <a:p>
+            <a:r>
+              <a:t>Loop:</a:t>
+            </a:r>
+          </a:p>
+          <a:p>
+            <a:r>
+              <a:t>If `open list` is empty, return failure (no solution found).</a:t>
+            </a:r>
+          </a:p>
+          <a:p>
+            <a:r>
+              <a:t>Remove a node `n` from the `open list` (selection strategy varies per algorithm).</a:t>
+            </a:r>
+          </a:p>
+          <a:p>
+            <a:r>
+              <a:t>If `n` is a goal state, return the path from initial state to `n` (success).</a:t>
+            </a:r>
+          </a:p>
+          <a:p>
+            <a:r>
+              <a:t>Add `n` to the `closed list`.</a:t>
+            </a:r>
+          </a:p>
+          <a:p>
+            <a:r>
+              <a:t>Generate all successor nodes `s'` of `n`.</a:t>
+            </a:r>
+          </a:p>
+          <a:p>
+            <a:r>
+              <a:t>For each `s'`, if `s'` is not in `open list` and not in `closed list`, add `s'` to `open list`.</a:t>
+            </a:r>
+          </a:p>
+          <a:p>
+            <a:r>
+              <a:t>The difference between uninformed search algorithms primarily lies in the data structure used for the `open list` and thus the order of node expansion.</a:t>
             </a:r>
           </a:p>
         </p:txBody>
@@ -4963,7 +4989,7 @@
           <a:lstStyle/>
           <a:p>
             <a:r>
-              <a:t>Representing States</a:t>
+              <a:t>Topic 6: Evaluating Search Algorithms</a:t>
             </a:r>
           </a:p>
         </p:txBody>
@@ -4984,32 +5010,37 @@
           <a:lstStyle/>
           <a:p>
             <a:r>
-              <a:t>A state must contain enough information to decide what actions are legal and what states will result from those actions.</a:t>
-            </a:r>
-          </a:p>
-          <a:p>
-            <a:r>
-              <a:t>For the 8-puzzle, a state can be represented as a 3x3 array (or list) of numbers, where 0 represents the blank tile.</a:t>
-            </a:r>
-          </a:p>
-          <a:p>
-            <a:r>
-              <a:t>For the Missionaries and Cannibals problem, a state might be a tuple (M, C, B) representing the number of missionaries and cannibals on the left bank, and boat's position.</a:t>
-            </a:r>
-          </a:p>
-          <a:p>
-            <a:r>
-              <a:t>States should be precise, unambiguous, and complete, capturing all relevant aspects of the problem at a given point in time.</a:t>
-            </a:r>
-          </a:p>
-          <a:p>
-            <a:r>
-              <a:t>Choosing an appropriate level of abstraction for state representation is critical; too much detail can lead to a combinatorially explosive state space, too little can obscure important information.</a:t>
-            </a:r>
-          </a:p>
-          <a:p>
-            <a:r>
-              <a:t>The specific data structure used (e.g., list, array, object) depends on the problem and programming language.</a:t>
+              <a:t>Search algorithms are evaluated based on four key criteria:</a:t>
+            </a:r>
+          </a:p>
+          <a:p>
+            <a:r>
+              <a:t>**Completeness**: Is the algorithm guaranteed to find a solution if one exists? (Yes/No)</a:t>
+            </a:r>
+          </a:p>
+          <a:p>
+            <a:r>
+              <a:t>**Optimality**: Is the algorithm guaranteed to find the optimal (lowest cost) solution? (Yes/No)</a:t>
+            </a:r>
+          </a:p>
+          <a:p>
+            <a:r>
+              <a:t>**Time Complexity**: How long does it take to find a solution? Measured by the number of nodes generated/expanded.</a:t>
+            </a:r>
+          </a:p>
+          <a:p>
+            <a:r>
+              <a:t>**Space Complexity**: How much memory does the algorithm require? Measured by the maximum number of nodes stored in memory (open and closed lists).</a:t>
+            </a:r>
+          </a:p>
+          <a:p>
+            <a:r>
+              <a:t>These complexities are often expressed in terms of `b` (branching factor), `d` (depth of the shallowest goal), and `m` (maximum depth of the state space).</a:t>
+            </a:r>
+          </a:p>
+          <a:p>
+            <a:r>
+              <a:t>The trade-offs between these criteria often dictate which algorithm is suitable for a given problem.</a:t>
             </a:r>
           </a:p>
         </p:txBody>
@@ -5048,7 +5079,7 @@
           <a:lstStyle/>
           <a:p>
             <a:r>
-              <a:t>What is Artificial Intelligence (AI)?</a:t>
+              <a:t>Topic 1: Early Visions and Philosophical Roots</a:t>
             </a:r>
           </a:p>
         </p:txBody>
@@ -5069,32 +5100,32 @@
           <a:lstStyle/>
           <a:p>
             <a:r>
-              <a:t>AI is a broad field dedicated to making machines intelligent, often defined as systems that perceive their environment and take actions that maximize their chance of achieving designated goals.</a:t>
-            </a:r>
-          </a:p>
-          <a:p>
-            <a:r>
-              <a:t>Multiple definitions exist: 'thinking humanly' (cognitive modeling), 'acting humanly' (Turing Test), 'thinking rationally' (laws of thought), and 'acting rationally' (rational agent approach).</a:t>
-            </a:r>
-          </a:p>
-          <a:p>
-            <a:r>
-              <a:t>The 'rational agent' perspective is prevalent in modern AI, focusing on systems that operate autonomously to achieve goals optimally.</a:t>
-            </a:r>
-          </a:p>
-          <a:p>
-            <a:r>
-              <a:t>Core goals of AI include perception, reasoning, knowledge representation, learning, planning, and natural language processing.</a:t>
-            </a:r>
-          </a:p>
-          <a:p>
-            <a:r>
-              <a:t>AI encompasses various sub-disciplines, from machine learning and deep learning to robotics and computer vision.</a:t>
-            </a:r>
-          </a:p>
-          <a:p>
-            <a:r>
-              <a:t>It's not just about creating human-like intelligence, but also about building systems that perform tasks requiring intelligence.</a:t>
+              <a:t>The concept of intelligent machines dates back to ancient myths, such as Hephaestus's automatons in Greek mythology and the Golem in Jewish folklore.</a:t>
+            </a:r>
+          </a:p>
+          <a:p>
+            <a:r>
+              <a:t>Philosophical foundations of AI emerged from discussions on the nature of knowledge, reasoning, and the mind-body problem, notably from René Descartes, Thomas Hobbes, and Gottfried Leibniz.</a:t>
+            </a:r>
+          </a:p>
+          <a:p>
+            <a:r>
+              <a:t>Leibniz envisioned a 'calculus ratiocinator' for automated reasoning, a precursor to symbolic AI.</a:t>
+            </a:r>
+          </a:p>
+          <a:p>
+            <a:r>
+              <a:t>The advent of formal logic by George Boole in the 19th century provided the mathematical tools necessary to represent and manipulate logical statements.</a:t>
+            </a:r>
+          </a:p>
+          <a:p>
+            <a:r>
+              <a:t>Early 20th-century developments in computability theory by Alan Turing and Alonzo Church laid the theoretical groundwork for general-purpose computers.</a:t>
+            </a:r>
+          </a:p>
+          <a:p>
+            <a:r>
+              <a:t>Alan Turing's seminal 1950 paper, 'Computing Machinery and Intelligence', introduced the 'Imitation Game' (Turing Test) as a practical measure of machine intelligence.</a:t>
             </a:r>
           </a:p>
         </p:txBody>
@@ -5133,7 +5164,7 @@
           <a:lstStyle/>
           <a:p>
             <a:r>
-              <a:t>Actions and Transitions (Operators)</a:t>
+              <a:t>Topic 6: Limitations of Uninformed Search</a:t>
             </a:r>
           </a:p>
         </p:txBody>
@@ -5154,32 +5185,32 @@
           <a:lstStyle/>
           <a:p>
             <a:r>
-              <a:t>Actions (also called operators or moves) are functions that map one state to another, defining the possible transitions within the state space.</a:t>
-            </a:r>
-          </a:p>
-          <a:p>
-            <a:r>
-              <a:t>Each action has preconditions (conditions that must be true for the action to be applied) and effects (how the state changes after the action).</a:t>
-            </a:r>
-          </a:p>
-          <a:p>
-            <a:r>
-              <a:t>For the 8-puzzle, actions are 'move blank left', 'move blank right', 'move blank up', 'move blank down', each having preconditions (e.g., cannot move blank left if it's already in the leftmost column).</a:t>
-            </a:r>
-          </a:p>
-          <a:p>
-            <a:r>
-              <a:t>A 'successor function' takes a state as input and returns a list of (action, successor_state) pairs reachable from the input state.</a:t>
-            </a:r>
-          </a:p>
-          <a:p>
-            <a:r>
-              <a:t>The cost of an action (edge weight) can also be associated, representing the effort, time, or resources required to perform it.</a:t>
-            </a:r>
-          </a:p>
-          <a:p>
-            <a:r>
-              <a:t>Defining actions correctly ensures that the search explores only valid paths and avoids illegal moves.</a:t>
+              <a:t>**Computational Cost**: For problems with large branching factors and deep solution paths, uninformed search can be extremely inefficient.</a:t>
+            </a:r>
+          </a:p>
+          <a:p>
+            <a:r>
+              <a:t>They may explore vast, irrelevant portions of the search space before stumbling upon a goal.</a:t>
+            </a:r>
+          </a:p>
+          <a:p>
+            <a:r>
+              <a:t>**Memory Consumption**: Algorithms like Breadth-First Search can consume enormous amounts of memory, as they need to store all nodes at a given depth.</a:t>
+            </a:r>
+          </a:p>
+          <a:p>
+            <a:r>
+              <a:t>This makes them impractical for problems with deep solutions.</a:t>
+            </a:r>
+          </a:p>
+          <a:p>
+            <a:r>
+              <a:t>**Lack of Direction**: Without any domain-specific knowledge or heuristics, uniformed searches essentially perform a brute-force exploration.</a:t>
+            </a:r>
+          </a:p>
+          <a:p>
+            <a:r>
+              <a:t>They are best suited for problems with small, finite state spaces or where the solution is known to be very shallow.</a:t>
             </a:r>
           </a:p>
         </p:txBody>
@@ -5218,7 +5249,7 @@
           <a:lstStyle/>
           <a:p>
             <a:r>
-              <a:t>Graph vs. Tree Representation</a:t>
+              <a:t>Topic 6: When to Use Uninformed Search</a:t>
             </a:r>
           </a:p>
         </p:txBody>
@@ -5239,32 +5270,32 @@
           <a:lstStyle/>
           <a:p>
             <a:r>
-              <a:t>The underlying state space is fundamentally a graph, as different action sequences can often lead to the same state, forming cycles.</a:t>
-            </a:r>
-          </a:p>
-          <a:p>
-            <a:r>
-              <a:t>In a 'state space graph', each node represents a unique state, and edges represent transitions between them. Cycles are common.</a:t>
-            </a:r>
-          </a:p>
-          <a:p>
-            <a:r>
-              <a:t>A 'search tree', on the other hand, is a conceptual tree built by the search algorithm during its exploration.</a:t>
-            </a:r>
-          </a:p>
-          <a:p>
-            <a:r>
-              <a:t>In a search tree, multiple nodes can correspond to the same state if that state is reached via different paths.</a:t>
-            </a:r>
-          </a:p>
-          <a:p>
-            <a:r>
-              <a:t>A node in a search tree typically stores the path from the root (initial state) to that state, making it easy to reconstruct the solution.</a:t>
-            </a:r>
-          </a:p>
-          <a:p>
-            <a:r>
-              <a:t>Algorithms often build a search tree to keep track of the exploration process and implicitly manage visited states in the underlying graph.</a:t>
+              <a:t>Uninformed search methods are appropriate when no heuristic information is available or easily computable for a given problem.</a:t>
+            </a:r>
+          </a:p>
+          <a:p>
+            <a:r>
+              <a:t>They serve as baseline methods against which more sophisticated (informed) algorithms can be compared.</a:t>
+            </a:r>
+          </a:p>
+          <a:p>
+            <a:r>
+              <a:t>Useful for problems with small search spaces, where exhaustive exploration is feasible without excessive computational cost.</a:t>
+            </a:r>
+          </a:p>
+          <a:p>
+            <a:r>
+              <a:t>For problems where completeness and optimality are paramount, and the solution depth is known to be shallow (e.g., BFS and UCS guarantees).</a:t>
+            </a:r>
+          </a:p>
+          <a:p>
+            <a:r>
+              <a:t>Often used in pedagogical settings to introduce core search concepts before delving into more complex heuristic-guided approaches.</a:t>
+            </a:r>
+          </a:p>
+          <a:p>
+            <a:r>
+              <a:t>They highlight the necessity of incorporating domain-specific knowledge to improve search efficiency in complex AI problems.</a:t>
             </a:r>
           </a:p>
         </p:txBody>
@@ -5303,7 +5334,7 @@
           <a:lstStyle/>
           <a:p>
             <a:r>
-              <a:t>Importance in Problem Solving</a:t>
+              <a:t>Topic 7: Breadth-First Search (BFS) - Algorithm</a:t>
             </a:r>
           </a:p>
         </p:txBody>
@@ -5324,32 +5355,37 @@
           <a:lstStyle/>
           <a:p>
             <a:r>
-              <a:t>Effective state space representation is the bedrock of problem-solving in AI, directly influencing the feasibility and efficiency of search.</a:t>
-            </a:r>
-          </a:p>
-          <a:p>
-            <a:r>
-              <a:t>A good representation can prune the search space, making an intractable problem solvable.</a:t>
-            </a:r>
-          </a:p>
-          <a:p>
-            <a:r>
-              <a:t>It dictates how easily successor states can be generated and how quickly goal states can be identified.</a:t>
-            </a:r>
-          </a:p>
-          <a:p>
-            <a:r>
-              <a:t>Poor representation can lead to an enormous or ill-defined state space, causing algorithms to become computationally prohibitive.</a:t>
-            </a:r>
-          </a:p>
-          <a:p>
-            <a:r>
-              <a:t>Choosing the right level of abstraction for states and actions is a crucial skill in AI system design.</a:t>
-            </a:r>
-          </a:p>
-          <a:p>
-            <a:r>
-              <a:t>This foundational understanding enables the application of generic search algorithms to a wide variety of specific problems.</a:t>
+              <a:t>Breadth-First Search (BFS) is an uninformed search algorithm that explores the search space level by level.</a:t>
+            </a:r>
+          </a:p>
+          <a:p>
+            <a:r>
+              <a:t>It expands all nodes at depth `d` before expanding any nodes at depth `d+1`.</a:t>
+            </a:r>
+          </a:p>
+          <a:p>
+            <a:r>
+              <a:t>BFS uses a **queue** (First-In, First-Out) for its `open list` (fringe), ensuring that the oldest, shallowest nodes are expanded first.</a:t>
+            </a:r>
+          </a:p>
+          <a:p>
+            <a:r>
+              <a:t>Start with the initial node, add it to the queue.</a:t>
+            </a:r>
+          </a:p>
+          <a:p>
+            <a:r>
+              <a:t>While the queue is not empty, dequeue a node, check if it's the goal. If not, generate its children and enqueue them.</a:t>
+            </a:r>
+          </a:p>
+          <a:p>
+            <a:r>
+              <a:t>To prevent cycles and redundant work, a `closed list` (set of visited nodes) is maintained.</a:t>
+            </a:r>
+          </a:p>
+          <a:p>
+            <a:r>
+              <a:t>The path to the goal can be reconstructed by storing parent pointers for each node.</a:t>
             </a:r>
           </a:p>
         </p:txBody>
@@ -5388,7 +5424,7 @@
           <a:lstStyle/>
           <a:p>
             <a:r>
-              <a:t>Topic 6: Uninformed Search</a:t>
+              <a:t>Topic 7: BFS Properties: Completeness and Optimality</a:t>
             </a:r>
           </a:p>
         </p:txBody>
@@ -5409,32 +5445,32 @@
           <a:lstStyle/>
           <a:p>
             <a:r>
-              <a:t>This section introduces Uninformed Search strategies, also known as 'blind search', which are fundamental in AI.</a:t>
-            </a:r>
-          </a:p>
-          <a:p>
-            <a:r>
-              <a:t>These algorithms operate without any domain-specific knowledge or heuristics to guide their search, exploring the state space systematically.</a:t>
-            </a:r>
-          </a:p>
-          <a:p>
-            <a:r>
-              <a:t>Understanding uninformed search is crucial as it forms the basis for more advanced informed search techniques.</a:t>
-            </a:r>
-          </a:p>
-          <a:p>
-            <a:r>
-              <a:t>The objective is to explore the principles, properties, and trade-offs of various blind search methods.</a:t>
-            </a:r>
-          </a:p>
-          <a:p>
-            <a:r>
-              <a:t>We will analyze their completeness, optimality, and computational complexity (time and space).</a:t>
-            </a:r>
-          </a:p>
-          <a:p>
-            <a:r>
-              <a:t>This topic provides the theoretical foundation for navigating state spaces and finding solutions.</a:t>
+              <a:t>**Completeness**: BFS is complete. If a solution exists, BFS is guaranteed to find it, assuming the branching factor `b` is finite.</a:t>
+            </a:r>
+          </a:p>
+          <a:p>
+            <a:r>
+              <a:t>This is because it explores all nodes at a shallower depth before moving to deeper ones, ensuring it will eventually reach any reachable goal.</a:t>
+            </a:r>
+          </a:p>
+          <a:p>
+            <a:r>
+              <a:t>**Optimality**: BFS is optimal if step costs are uniform (e.g., each action costs 1). In this scenario, the first goal found will always be the shallowest, and thus the one with the fewest steps.</a:t>
+            </a:r>
+          </a:p>
+          <a:p>
+            <a:r>
+              <a:t>If step costs vary, BFS is not guaranteed to find the optimal solution; Uniform-Cost Search is needed for that.</a:t>
+            </a:r>
+          </a:p>
+          <a:p>
+            <a:r>
+              <a:t>The path found is of minimum length in terms of number of steps.</a:t>
+            </a:r>
+          </a:p>
+          <a:p>
+            <a:r>
+              <a:t>This makes BFS suitable for problems where the shortest path (in terms of moves) is desired and all moves have equal cost.</a:t>
             </a:r>
           </a:p>
         </p:txBody>
@@ -5473,7 +5509,7 @@
           <a:lstStyle/>
           <a:p>
             <a:r>
-              <a:t>Introduction to Uninformed Search</a:t>
+              <a:t>Topic 7: BFS Properties: Time Complexity</a:t>
             </a:r>
           </a:p>
         </p:txBody>
@@ -5494,32 +5530,32 @@
           <a:lstStyle/>
           <a:p>
             <a:r>
-              <a:t>Uninformed search strategies are methods for traversing a state space graph or tree without using any problem-specific knowledge beyond the problem definition itself.</a:t>
-            </a:r>
-          </a:p>
-          <a:p>
-            <a:r>
-              <a:t>They are 'blind' in the sense that they cannot distinguish between more or less promising states, exploring states in a predetermined order.</a:t>
-            </a:r>
-          </a:p>
-          <a:p>
-            <a:r>
-              <a:t>The primary goal is to find *any* path from the initial state to a goal state, though some methods can also find an optimal path.</a:t>
-            </a:r>
-          </a:p>
-          <a:p>
-            <a:r>
-              <a:t>These strategies are general-purpose algorithms that can be applied to any search problem that is formally defined.</a:t>
-            </a:r>
-          </a:p>
-          <a:p>
-            <a:r>
-              <a:t>Examples include Breadth-First Search (BFS), Depth-First Search (DFS), Uniform Cost Search, and Iterative Deepening DFS.</a:t>
-            </a:r>
-          </a:p>
-          <a:p>
-            <a:r>
-              <a:t>While often less efficient than informed search, they provide guarantees about finding solutions under certain conditions.</a:t>
+              <a:t>The time complexity of BFS is proportional to the number of nodes expanded, which is related to the branching factor `b` and the depth `d` of the shallowest goal.</a:t>
+            </a:r>
+          </a:p>
+          <a:p>
+            <a:r>
+              <a:t>In the worst case, BFS might expand all nodes up to depth `d`.</a:t>
+            </a:r>
+          </a:p>
+          <a:p>
+            <a:r>
+              <a:t>The number of nodes at depth `d` is `b^d`, and the total number of nodes in a tree up to depth `d` is `1 + b + b^2 + ... + b^d = (b^(d+1) - 1) / (b-1)`, which is approximately `O(b^d)`.</a:t>
+            </a:r>
+          </a:p>
+          <a:p>
+            <a:r>
+              <a:t>Thus, time complexity is **O(b^d)**. This exponential complexity can be very high for deep solutions or large branching factors.</a:t>
+            </a:r>
+          </a:p>
+          <a:p>
+            <a:r>
+              <a:t>For example, if `b=10` and `d=5`, BFS might explore 100,000 nodes.</a:t>
+            </a:r>
+          </a:p>
+          <a:p>
+            <a:r>
+              <a:t>This exponential growth is the primary practical limitation of BFS for large problem instances.</a:t>
             </a:r>
           </a:p>
         </p:txBody>
@@ -5558,7 +5594,7 @@
           <a:lstStyle/>
           <a:p>
             <a:r>
-              <a:t>Key Properties of Search Algorithms</a:t>
+              <a:t>Topic 7: BFS Properties: Space Complexity</a:t>
             </a:r>
           </a:p>
         </p:txBody>
@@ -5579,37 +5615,32 @@
           <a:lstStyle/>
           <a:p>
             <a:r>
-              <a:t>When evaluating search algorithms, four key properties are considered:</a:t>
-            </a:r>
-          </a:p>
-          <a:p>
-            <a:r>
-              <a:t>1. Completeness: Guarantees that if a solution exists, the algorithm will eventually find it. Important for problems where solutions are rare or hard to find.</a:t>
-            </a:r>
-          </a:p>
-          <a:p>
-            <a:r>
-              <a:t>2. Optimality: Guarantees that the algorithm finds the best (e.g., cheapest, shortest) solution among all possible solutions. Relevant when path costs matter.</a:t>
-            </a:r>
-          </a:p>
-          <a:p>
-            <a:r>
-              <a:t>3. Time Complexity: Measures the time taken by the algorithm to find a solution, typically as a function of the branching factor (b) and depth of the solution (d) or maximum depth (m).</a:t>
-            </a:r>
-          </a:p>
-          <a:p>
-            <a:r>
-              <a:t>4. Space Complexity: Measures the maximum memory required by the algorithm to store states and other data structures during the search.</a:t>
-            </a:r>
-          </a:p>
-          <a:p>
-            <a:r>
-              <a:t>These properties help in choosing the most appropriate search strategy for a given problem and resource constraints.</a:t>
-            </a:r>
-          </a:p>
-          <a:p>
-            <a:r>
-              <a:t>There is often a trade-off between optimality, completeness, and computational complexity.</a:t>
+              <a:t>BFS also suffers from significant space complexity, as it needs to store all nodes in the queue and the `closed list`.</a:t>
+            </a:r>
+          </a:p>
+          <a:p>
+            <a:r>
+              <a:t>In the worst case, all nodes at depth `d` are stored in the queue simultaneously before expansion.</a:t>
+            </a:r>
+          </a:p>
+          <a:p>
+            <a:r>
+              <a:t>The number of nodes at depth `d` is `b^d`.</a:t>
+            </a:r>
+          </a:p>
+          <a:p>
+            <a:r>
+              <a:t>Therefore, space complexity is also **O(b^d)**.</a:t>
+            </a:r>
+          </a:p>
+          <a:p>
+            <a:r>
+              <a:t>This can quickly exhaust available memory for problems with deep solutions, even if the total number of states isn't excessively large.</a:t>
+            </a:r>
+          </a:p>
+          <a:p>
+            <a:r>
+              <a:t>For `b=10` and `d=5`, storing 100,000 nodes might require considerable memory, each node potentially storing state information and parent pointers.</a:t>
             </a:r>
           </a:p>
         </p:txBody>
@@ -5648,7 +5679,7 @@
           <a:lstStyle/>
           <a:p>
             <a:r>
-              <a:t>Types of Uninformed Search</a:t>
+              <a:t>Topic 7: BFS Example and Use Cases</a:t>
             </a:r>
           </a:p>
         </p:txBody>
@@ -5669,37 +5700,32 @@
           <a:lstStyle/>
           <a:p>
             <a:r>
-              <a:t>1. Breadth-First Search (BFS): Explores all nodes at the current depth level before moving to the next level.</a:t>
-            </a:r>
-          </a:p>
-          <a:p>
-            <a:r>
-              <a:t>2. Depth-First Search (DFS): Explores as far as possible along each branch before backtracking.</a:t>
-            </a:r>
-          </a:p>
-          <a:p>
-            <a:r>
-              <a:t>3. Uniform Cost Search (UCS): Expands the node with the lowest path cost from the start node, guaranteeing an optimal solution in general graphs.</a:t>
-            </a:r>
-          </a:p>
-          <a:p>
-            <a:r>
-              <a:t>4. Depth-Limited Search (DLS): DFS with a predetermined depth limit 'L', preventing infinite loops in cyclic graphs.</a:t>
-            </a:r>
-          </a:p>
-          <a:p>
-            <a:r>
-              <a:t>5. Iterative Deepening Depth-First Search (IDDFS): Combines DFS's space efficiency with BFS's completeness and optimality by performing DLS repeatedly with increasing depth limits.</a:t>
-            </a:r>
-          </a:p>
-          <a:p>
-            <a:r>
-              <a:t>6. Bidirectional Search: Runs two simultaneous searches, one forward from the initial state and one backward from the goal state, meeting in the middle.</a:t>
-            </a:r>
-          </a:p>
-          <a:p>
-            <a:r>
-              <a:t>Each type has distinct characteristics regarding completeness, optimality, and complexity trade-offs.</a:t>
+              <a:t>Consider finding the shortest path in an unweighted graph (e.g., shortest number of bus stops to reach a destination). BFS is ideal.</a:t>
+            </a:r>
+          </a:p>
+          <a:p>
+            <a:r>
+              <a:t>**Example: Maze Solving**: Starting from the entrance, BFS explores all adjacent cells, then all cells adjacent to those, and so on, until the exit is found.</a:t>
+            </a:r>
+          </a:p>
+          <a:p>
+            <a:r>
+              <a:t>The first path found guarantees the minimum number of moves.</a:t>
+            </a:r>
+          </a:p>
+          <a:p>
+            <a:r>
+              <a:t>**Applications**: Finding the shortest path between two nodes in an unweighted graph, web crawling (exploring web pages 'level by level'), network broadcasting.</a:t>
+            </a:r>
+          </a:p>
+          <a:p>
+            <a:r>
+              <a:t>BFS is a foundational algorithm in graph theory and is often used when paths are desired in terms of minimal edges, or when exploring neighbors uniformly.</a:t>
+            </a:r>
+          </a:p>
+          <a:p>
+            <a:r>
+              <a:t>It's generally preferred over DFS when the solution is known to be shallow, or when optimality for unit-cost paths is critical.</a:t>
             </a:r>
           </a:p>
         </p:txBody>
@@ -5738,7 +5764,7 @@
           <a:lstStyle/>
           <a:p>
             <a:r>
-              <a:t>When to Use Uninformed Search</a:t>
+              <a:t>Topic 8: Depth-First Search (DFS) - Algorithm</a:t>
             </a:r>
           </a:p>
         </p:txBody>
@@ -5759,32 +5785,37 @@
           <a:lstStyle/>
           <a:p>
             <a:r>
-              <a:t>Uninformed search is appropriate in situations where problem-specific knowledge or heuristics are unavailable or difficult to formulate.</a:t>
-            </a:r>
-          </a:p>
-          <a:p>
-            <a:r>
-              <a:t>They are suitable for relatively small state spaces where the computational cost of exploration is manageable.</a:t>
-            </a:r>
-          </a:p>
-          <a:p>
-            <a:r>
-              <a:t>When a solution is guaranteed to exist and any solution is acceptable (not necessarily optimal), DFS or BFS might suffice.</a:t>
-            </a:r>
-          </a:p>
-          <a:p>
-            <a:r>
-              <a:t>For finding optimal solutions in unweighted graphs, BFS is a good choice due to its level-by-level exploration.</a:t>
-            </a:r>
-          </a:p>
-          <a:p>
-            <a:r>
-              <a:t>For finding optimal solutions in weighted graphs without a heuristic, Uniform Cost Search is necessary.</a:t>
-            </a:r>
-          </a:p>
-          <a:p>
-            <a:r>
-              <a:t>IDDFS is often preferred for its completeness, optimality (for optimal path length), and relatively low space complexity.</a:t>
+              <a:t>Depth-First Search (DFS) is an uninformed search algorithm that explores as far as possible along each branch before backtracking.</a:t>
+            </a:r>
+          </a:p>
+          <a:p>
+            <a:r>
+              <a:t>It expands the deepest unexpanded node first.</a:t>
+            </a:r>
+          </a:p>
+          <a:p>
+            <a:r>
+              <a:t>DFS uses a **stack** (Last-In, First-Out) for its `open list` (fringe), ensuring that the most recently added, deepest nodes are expanded first.</a:t>
+            </a:r>
+          </a:p>
+          <a:p>
+            <a:r>
+              <a:t>Start with the initial node, add it to the stack.</a:t>
+            </a:r>
+          </a:p>
+          <a:p>
+            <a:r>
+              <a:t>While the stack is not empty, pop a node, check if it's the goal. If not, generate its children and push them onto the stack (order can affect efficiency).</a:t>
+            </a:r>
+          </a:p>
+          <a:p>
+            <a:r>
+              <a:t>A `closed list` (set of visited nodes) is crucial to prevent infinite loops in graphs with cycles.</a:t>
+            </a:r>
+          </a:p>
+          <a:p>
+            <a:r>
+              <a:t>The path to the goal is reconstructed by following parent pointers from the goal node back to the initial state.</a:t>
             </a:r>
           </a:p>
         </p:txBody>
@@ -5823,7 +5854,7 @@
           <a:lstStyle/>
           <a:p>
             <a:r>
-              <a:t>Limitations of Uninformed Search</a:t>
+              <a:t>Topic 8: DFS Properties: Completeness</a:t>
             </a:r>
           </a:p>
         </p:txBody>
@@ -5844,32 +5875,32 @@
           <a:lstStyle/>
           <a:p>
             <a:r>
-              <a:t>The primary limitation is their computational expense, especially for large state spaces, due to their 'blind' exploration.</a:t>
-            </a:r>
-          </a:p>
-          <a:p>
-            <a:r>
-              <a:t>Time complexity often grows exponentially with the depth of the solution (b^d), making them impractical for deep solutions.</a:t>
-            </a:r>
-          </a:p>
-          <a:p>
-            <a:r>
-              <a:t>Space complexity can also be a significant issue, particularly for BFS, which must store all nodes at the current level.</a:t>
-            </a:r>
-          </a:p>
-          <a:p>
-            <a:r>
-              <a:t>Without a heuristic, they cannot effectively prioritize promising paths, leading to extensive exploration of unpromising regions.</a:t>
-            </a:r>
-          </a:p>
-          <a:p>
-            <a:r>
-              <a:t>They are inefficient for problems where the branching factor is very high or the goal is very deep.</a:t>
-            </a:r>
-          </a:p>
-          <a:p>
-            <a:r>
-              <a:t>Real-world problems with vast state spaces typically require informed search techniques to be solvable within reasonable time and memory.</a:t>
+              <a:t>**Completeness**: DFS is generally not complete for infinite state spaces or graphs with cycles if a `closed list` is not used.</a:t>
+            </a:r>
+          </a:p>
+          <a:p>
+            <a:r>
+              <a:t>Without a `closed list`, DFS can get stuck in an infinite loop by traversing a cycle repeatedly.</a:t>
+            </a:r>
+          </a:p>
+          <a:p>
+            <a:r>
+              <a:t>Even with a `closed list`, if the search space is infinitely deep and the goal is at a finite depth, DFS might go down an infinitely long path first and never find the goal.</a:t>
+            </a:r>
+          </a:p>
+          <a:p>
+            <a:r>
+              <a:t>However, if the search space is finite and there are no infinite paths (or cycles are detected by a `closed list`), DFS is complete.</a:t>
+            </a:r>
+          </a:p>
+          <a:p>
+            <a:r>
+              <a:t>To ensure completeness in general graphs, a `closed list` must be used to detect and avoid re-visiting states.</a:t>
+            </a:r>
+          </a:p>
+          <a:p>
+            <a:r>
+              <a:t>For tree search, DFS is incomplete if the tree has infinite depth.</a:t>
             </a:r>
           </a:p>
         </p:txBody>
@@ -5908,7 +5939,7 @@
           <a:lstStyle/>
           <a:p>
             <a:r>
-              <a:t>Topic 7: BFS (Breadth-First Search)</a:t>
+              <a:t>Topic 8: DFS Properties: Optimality</a:t>
             </a:r>
           </a:p>
         </p:txBody>
@@ -5929,32 +5960,32 @@
           <a:lstStyle/>
           <a:p>
             <a:r>
-              <a:t>This section focuses on Breadth-First Search (BFS), a foundational uninformed search algorithm.</a:t>
-            </a:r>
-          </a:p>
-          <a:p>
-            <a:r>
-              <a:t>We will examine its step-by-step operation, how it explores a state space, and its data structures.</a:t>
-            </a:r>
-          </a:p>
-          <a:p>
-            <a:r>
-              <a:t>Understanding BFS is critical for graspings search fundamentals and its applications in various computing domains.</a:t>
-            </a:r>
-          </a:p>
-          <a:p>
-            <a:r>
-              <a:t>The objective is to provide a detailed understanding of BFS's properties, complexity, and practical uses.</a:t>
-            </a:r>
-          </a:p>
-          <a:p>
-            <a:r>
-              <a:t>We'll cover its completeness and optimality guarantees, along with its time and space requirements.</a:t>
-            </a:r>
-          </a:p>
-          <a:p>
-            <a:r>
-              <a:t>BFS offers a robust method for finding shortest paths in unweighted graphs.</a:t>
+              <a:t>**Optimality**: DFS is generally not optimal, even for uniform step costs.</a:t>
+            </a:r>
+          </a:p>
+          <a:p>
+            <a:r>
+              <a:t>Because DFS explores deeply, it might find a long path to a goal before exploring shorter, shallower paths.</a:t>
+            </a:r>
+          </a:p>
+          <a:p>
+            <a:r>
+              <a:t>It does not guarantee finding the shortest or lowest-cost path, even if one exists.</a:t>
+            </a:r>
+          </a:p>
+          <a:p>
+            <a:r>
+              <a:t>For example, if the closest goal is at depth `d`, but there's a much deeper path that DFS explores first, it will find the deeper goal and terminate.</a:t>
+            </a:r>
+          </a:p>
+          <a:p>
+            <a:r>
+              <a:t>This makes DFS unsuitable for problems where an optimal solution (minimum path cost) is strictly required.</a:t>
+            </a:r>
+          </a:p>
+          <a:p>
+            <a:r>
+              <a:t>The primary advantage of DFS is often its space efficiency rather than its solution quality.</a:t>
             </a:r>
           </a:p>
         </p:txBody>
@@ -5993,7 +6024,7 @@
           <a:lstStyle/>
           <a:p>
             <a:r>
-              <a:t>Early Foundations &amp; Philosophical Roots</a:t>
+              <a:t>Topic 1: The Birth of AI (1950s-1970s)</a:t>
             </a:r>
           </a:p>
         </p:txBody>
@@ -6014,32 +6045,32 @@
           <a:lstStyle/>
           <a:p>
             <a:r>
-              <a:t>The concept of intelligent machines dates back to ancient myths and philosophical inquiries into the nature of thought and reasoning.</a:t>
-            </a:r>
-          </a:p>
-          <a:p>
-            <a:r>
-              <a:t>Ancient Greek myths (e.g., Talos) and automata from various cultures explored the idea of artificial beings.</a:t>
-            </a:r>
-          </a:p>
-          <a:p>
-            <a:r>
-              <a:t>Key philosophical contributions from Descartes, Hobbes, and Leibniz laid groundwork by exploring the mechanical nature of mind and symbolic thought.</a:t>
-            </a:r>
-          </a:p>
-          <a:p>
-            <a:r>
-              <a:t>Formal logic, developed by Aristotle, Boole, and Frege, provided the tools for formalizing reasoning processes, crucial for early AI.</a:t>
-            </a:r>
-          </a:p>
-          <a:p>
-            <a:r>
-              <a:t>Key mathematical developments in computability theory (Turing, Church, Gödel) in the 20th century demonstrated what could be computed.</a:t>
-            </a:r>
-          </a:p>
-          <a:p>
-            <a:r>
-              <a:t>Alan Turing's 1950 paper 'Computing Machinery and Intelligence' introduced the Turing Test and posed fundamental questions about machine intelligence.</a:t>
+              <a:t>The term 'Artificial Intelligence' was coined by John McCarthy in 1956 for the Dartmouth Summer Research Project on Artificial Intelligence, marking the field's formal inception.</a:t>
+            </a:r>
+          </a:p>
+          <a:p>
+            <a:r>
+              <a:t>Early AI research focused on symbolic reasoning, attempting to mimic human problem-solving through logical inference and rule-based systems.</a:t>
+            </a:r>
+          </a:p>
+          <a:p>
+            <a:r>
+              <a:t>Key early achievements include Allen Newell and Herbert Simon's Logic Theorist (1956), which proved mathematical theorems, and General Problem Solver (GPS) (1959).</a:t>
+            </a:r>
+          </a:p>
+          <a:p>
+            <a:r>
+              <a:t>Marvin Minsky and Seymour Papert's work at MIT laid foundations for neural networks and machine perception, though their 1969 book 'Perceptrons' initially dampened enthusiasm for neural nets.</a:t>
+            </a:r>
+          </a:p>
+          <a:p>
+            <a:r>
+              <a:t>Early AI programs like ELIZA (1966) simulated conversational interaction, and SHRDLU (1972) demonstrated natural language understanding in a limited 'blocks world'.</a:t>
+            </a:r>
+          </a:p>
+          <a:p>
+            <a:r>
+              <a:t>This period saw significant optimism, fueled by breakthroughs in automated reasoning and symbolic manipulation, leading to ambitious predictions about AI's future.</a:t>
             </a:r>
           </a:p>
         </p:txBody>
@@ -6078,7 +6109,7 @@
           <a:lstStyle/>
           <a:p>
             <a:r>
-              <a:t>BFS Algorithm Overview</a:t>
+              <a:t>Topic 8: DFS Properties: Time and Space Complexity</a:t>
             </a:r>
           </a:p>
         </p:txBody>
@@ -6099,32 +6130,37 @@
           <a:lstStyle/>
           <a:p>
             <a:r>
-              <a:t>Breadth-First Search (BFS) is an algorithm for traversing or searching tree or graph data structures.</a:t>
-            </a:r>
-          </a:p>
-          <a:p>
-            <a:r>
-              <a:t>It systematically explores the graph level by level, starting from the root (initial state) and exploring all immediate neighbors.</a:t>
-            </a:r>
-          </a:p>
-          <a:p>
-            <a:r>
-              <a:t>After visiting all nodes at the current depth, it moves on to the nodes at the next depth level.</a:t>
-            </a:r>
-          </a:p>
-          <a:p>
-            <a:r>
-              <a:t>This process ensures that it finds the shallowest (shortest) path to any goal node in an unweighted graph.</a:t>
-            </a:r>
-          </a:p>
-          <a:p>
-            <a:r>
-              <a:t>BFS typically uses a Queue data structure to manage the order of node expansion, ensuring FIFO (First-In, First-Out) processing.</a:t>
-            </a:r>
-          </a:p>
-          <a:p>
-            <a:r>
-              <a:t>It's widely used in problems where the shortest path in terms of number of steps is desired.</a:t>
+              <a:t>**Time Complexity**: In the worst case, DFS might explore the entire search space up to the maximum depth `m`.</a:t>
+            </a:r>
+          </a:p>
+          <a:p>
+            <a:r>
+              <a:t>This results in a time complexity of **O(b^m)**, where `b` is the branching factor and `m` is the maximum depth of the search tree.</a:t>
+            </a:r>
+          </a:p>
+          <a:p>
+            <a:r>
+              <a:t>If `m` is much larger than `d` (the depth of the shallowest goal), DFS can be significantly slower than BFS.</a:t>
+            </a:r>
+          </a:p>
+          <a:p>
+            <a:r>
+              <a:t>**Space Complexity**: DFS has a much lower space complexity compared to BFS.</a:t>
+            </a:r>
+          </a:p>
+          <a:p>
+            <a:r>
+              <a:t>It only needs to store the current path from the root to the deepest node being explored, plus the unexpanded siblings for backtracking.</a:t>
+            </a:r>
+          </a:p>
+          <a:p>
+            <a:r>
+              <a:t>The space complexity is **O(b*m)**, where `b` is the branching factor and `m` is the maximum depth.</a:t>
+            </a:r>
+          </a:p>
+          <a:p>
+            <a:r>
+              <a:t>This linear space complexity is a major advantage for problems with very deep but narrow search spaces, or when memory is limited.</a:t>
             </a:r>
           </a:p>
         </p:txBody>
@@ -6163,7 +6199,7 @@
           <a:lstStyle/>
           <a:p>
             <a:r>
-              <a:t>BFS Pseudocode/Steps</a:t>
+              <a:t>Topic 8: DFS Example and Use Cases</a:t>
             </a:r>
           </a:p>
         </p:txBody>
@@ -6184,42 +6220,32 @@
           <a:lstStyle/>
           <a:p>
             <a:r>
-              <a:t>1. Initialize a Queue with the initial state (node) and a set to keep track of visited states.</a:t>
-            </a:r>
-          </a:p>
-          <a:p>
-            <a:r>
-              <a:t>2. While the Queue is not empty:</a:t>
-            </a:r>
-          </a:p>
-          <a:p>
-            <a:r>
-              <a:t>3. Dequeue the first node from the Queue (let's call it current_node).</a:t>
-            </a:r>
-          </a:p>
-          <a:p>
-            <a:r>
-              <a:t>4. If current_node is the goal state, then a solution has been found. Reconstruct and return the path.</a:t>
-            </a:r>
-          </a:p>
-          <a:p>
-            <a:r>
-              <a:t>5. Otherwise, for each unvisited neighbor (successor state) of current_node:</a:t>
-            </a:r>
-          </a:p>
-          <a:p>
-            <a:r>
-              <a:t>6. Add the neighbor to the visited set and Enqueue it.</a:t>
-            </a:r>
-          </a:p>
-          <a:p>
-            <a:r>
-              <a:t>Note: A 'visited' set (or hash table) is crucial to avoid infinite loops in graphs and redundant processing.</a:t>
-            </a:r>
-          </a:p>
-          <a:p>
-            <a:r>
-              <a:t>Path reconstruction typically involves storing parent pointers in each node to trace back from the goal to the start.</a:t>
+              <a:t>**Example: Navigating a Tree/Graph**: DFS can be used to check if a path exists between two nodes, or to find connected components.</a:t>
+            </a:r>
+          </a:p>
+          <a:p>
+            <a:r>
+              <a:t>**Backtracking algorithms**: Many problems (e.g., N-Queens, Sudoku solvers, constraint satisfaction problems) naturally map to DFS with backtracking.</a:t>
+            </a:r>
+          </a:p>
+          <a:p>
+            <a:r>
+              <a:t>**Topological Sorting**: Used to order a directed acyclic graph (DAG) where nodes have dependencies.</a:t>
+            </a:r>
+          </a:p>
+          <a:p>
+            <a:r>
+              <a:t>**Cycle Detection**: In graph theory, DFS can efficiently detect cycles in a graph.</a:t>
+            </a:r>
+          </a:p>
+          <a:p>
+            <a:r>
+              <a:t>When the goal is known to be very deep, or memory is a severe constraint, DFS is often a good candidate.</a:t>
+            </a:r>
+          </a:p>
+          <a:p>
+            <a:r>
+              <a:t>However, if shallow solutions are preferred or optimality is required, other algorithms are generally more suitable.</a:t>
             </a:r>
           </a:p>
         </p:txBody>
@@ -6258,7 +6284,7 @@
           <a:lstStyle/>
           <a:p>
             <a:r>
-              <a:t>BFS Properties (Completeness &amp; Optimality)</a:t>
+              <a:t>Topic 9: Heuristic Search - Introduction</a:t>
             </a:r>
           </a:p>
         </p:txBody>
@@ -6279,32 +6305,32 @@
           <a:lstStyle/>
           <a:p>
             <a:r>
-              <a:t>Completeness: BFS is complete. If a solution exists, BFS is guaranteed to find it, provided the branching factor is finite.</a:t>
-            </a:r>
-          </a:p>
-          <a:p>
-            <a:r>
-              <a:t>This is because it explores all nodes at a given depth before moving deeper, ensuring no shallow solution is missed.</a:t>
-            </a:r>
-          </a:p>
-          <a:p>
-            <a:r>
-              <a:t>Optimality: BFS is optimal for unweighted graphs. It guarantees finding the shortest path (in terms of the number of actions/edges) to the goal.</a:t>
-            </a:r>
-          </a:p>
-          <a:p>
-            <a:r>
-              <a:t>This is because the first time BFS encounters a goal node, it must have traversed the minimum number of edges to reach it.</a:t>
-            </a:r>
-          </a:p>
-          <a:p>
-            <a:r>
-              <a:t>For weighted graphs, BFS is not optimal; Uniform Cost Search is required to guarantee the minimum cost path.</a:t>
-            </a:r>
-          </a:p>
-          <a:p>
-            <a:r>
-              <a:t>Its completeness and optimality make BFS a robust choice for certain types of search problems.</a:t>
+              <a:t>Heuristic search (also known as informed search) incorporates domain-specific knowledge to guide the search process.</a:t>
+            </a:r>
+          </a:p>
+          <a:p>
+            <a:r>
+              <a:t>Unlike uninformed search, these algorithms use an evaluation function, called a **heuristic function**, to estimate the 'cost' or 'distance' from a given state to the goal.</a:t>
+            </a:r>
+          </a:p>
+          <a:p>
+            <a:r>
+              <a:t>A heuristic function, denoted `h(n)`, estimates the cost of the cheapest path from state `n` to the goal state.</a:t>
+            </a:r>
+          </a:p>
+          <a:p>
+            <a:r>
+              <a:t>The goal is to expand nodes that are more likely to lead to a solution, thereby reducing the number of nodes explored and improving efficiency.</a:t>
+            </a:r>
+          </a:p>
+          <a:p>
+            <a:r>
+              <a:t>Heuristic search algorithms sacrifice guaranteed optimality for a potential increase in speed, though some (like A*) can be optimal under certain heuristic conditions.</a:t>
+            </a:r>
+          </a:p>
+          <a:p>
+            <a:r>
+              <a:t>Key heuristic search algorithms include Greedy Best-First Search and A* Search.</a:t>
             </a:r>
           </a:p>
         </p:txBody>
@@ -6343,7 +6369,7 @@
           <a:lstStyle/>
           <a:p>
             <a:r>
-              <a:t>BFS Complexity Analysis</a:t>
+              <a:t>Topic 9: The Heuristic Function h(n)</a:t>
             </a:r>
           </a:p>
         </p:txBody>
@@ -6364,32 +6390,32 @@
           <a:lstStyle/>
           <a:p>
             <a:r>
-              <a:t>Time Complexity: O(b^d), where 'b' is the branching factor (average number of successors per state) and 'd' is the depth of the shallowest goal.</a:t>
-            </a:r>
-          </a:p>
-          <a:p>
-            <a:r>
-              <a:t>In the worst case, BFS might explore all nodes up to depth 'd' and some nodes at depth 'd+1'.</a:t>
-            </a:r>
-          </a:p>
-          <a:p>
-            <a:r>
-              <a:t>This exponential complexity means BFS can be very slow for problems with deep solutions or high branching factors.</a:t>
-            </a:r>
-          </a:p>
-          <a:p>
-            <a:r>
-              <a:t>Space Complexity: O(b^d). This is often the most significant drawback of BFS.</a:t>
-            </a:r>
-          </a:p>
-          <a:p>
-            <a:r>
-              <a:t>In the worst case, BFS must store all nodes at depth 'd' in the queue, which can be an enormous number.</a:t>
-            </a:r>
-          </a:p>
-          <a:p>
-            <a:r>
-              <a:t>For very large state spaces, BFS can quickly run out of memory before finding a solution.</a:t>
+              <a:t>A heuristic function `h(n)` takes a state `n` and returns a non-negative numerical estimate of the cost from `n` to the nearest goal state.</a:t>
+            </a:r>
+          </a:p>
+          <a:p>
+            <a:r>
+              <a:t>The quality of a heuristic function directly impacts the performance of informed search algorithms.</a:t>
+            </a:r>
+          </a:p>
+          <a:p>
+            <a:r>
+              <a:t>A good heuristic is one that is 'admissible' and 'consistent' (or monotonic), properties critical for optimality guarantees.</a:t>
+            </a:r>
+          </a:p>
+          <a:p>
+            <a:r>
+              <a:t>**Admissible Heuristic**: A heuristic `h(n)` is admissible if for every node `n`, `h(n)` is less than or equal to the true cost `h*(n)` to reach the goal from `n`.</a:t>
+            </a:r>
+          </a:p>
+          <a:p>
+            <a:r>
+              <a:t>An admissible heuristic never overestimates the cost to the goal, making it optimistic.</a:t>
+            </a:r>
+          </a:p>
+          <a:p>
+            <a:r>
+              <a:t>**Consistent (Monotonic) Heuristic**: A heuristic `h(n)` is consistent if for every node `n` and every successor `n'` of `n` generated by action `a`, the cost of moving from `n` to `n'` plus `h(n')` is greater than or equal to `h(n)`: `h(n) ≤ c(n, a, n') + h(n')`.</a:t>
             </a:r>
           </a:p>
         </p:txBody>
@@ -6428,7 +6454,7 @@
           <a:lstStyle/>
           <a:p>
             <a:r>
-              <a:t>BFS Applications</a:t>
+              <a:t>Topic 9: Greedy Best-First Search (GBFS)</a:t>
             </a:r>
           </a:p>
         </p:txBody>
@@ -6449,32 +6475,32 @@
           <a:lstStyle/>
           <a:p>
             <a:r>
-              <a:t>Finding the shortest path in an unweighted graph: This is BFS's most common and direct application, e.g., finding the minimum number of moves in a game.</a:t>
-            </a:r>
-          </a:p>
-          <a:p>
-            <a:r>
-              <a:t>Web crawlers: BFS can be used to traverse the web, starting from a given URL and systematically visiting all linked pages level by level.</a:t>
-            </a:r>
-          </a:p>
-          <a:p>
-            <a:r>
-              <a:t>Social network analysis: Finding the shortest connection path between two people (e.g., 'degrees of separation').</a:t>
-            </a:r>
-          </a:p>
-          <a:p>
-            <a:r>
-              <a:t>GPS navigation systems: While often using informed search, BFS can be used for finding routes in simplified, unweighted road networks.</a:t>
-            </a:r>
-          </a:p>
-          <a:p>
-            <a:r>
-              <a:t>Broadcasting in networks: Sending a message to all nodes in a network using the shortest possible path.</a:t>
-            </a:r>
-          </a:p>
-          <a:p>
-            <a:r>
-              <a:t>Garbage collection in programming languages (e.g., Cheney's algorithm) and finding connected components in a graph.</a:t>
+              <a:t>Greedy Best-First Search expands the node that appears to be closest to the goal, according to the heuristic function `h(n)`.</a:t>
+            </a:r>
+          </a:p>
+          <a:p>
+            <a:r>
+              <a:t>It uses a **priority queue** for its `open list` (fringe), ordered by the `h(n)` value (lowest `h(n)` first).</a:t>
+            </a:r>
+          </a:p>
+          <a:p>
+            <a:r>
+              <a:t>At each step, GBFS selects the node that it believes is 'best' (i.e., has the smallest estimated cost to the goal) to expand next.</a:t>
+            </a:r>
+          </a:p>
+          <a:p>
+            <a:r>
+              <a:t>**Completeness**: GBFS is not complete. It can get stuck in infinite loops if a `closed list` is not used, or if it continuously explores paths that appear promising but lead away from the goal.</a:t>
+            </a:r>
+          </a:p>
+          <a:p>
+            <a:r>
+              <a:t>**Optimality**: GBFS is not optimal. It often finds a solution quickly but might miss the optimal path because it only considers the immediate estimated cost to the goal, not the cost incurred so far.</a:t>
+            </a:r>
+          </a:p>
+          <a:p>
+            <a:r>
+              <a:t>**Time &amp; Space Complexity**: Can be significantly better than uninformed search if the heuristic is good, but in the worst case, it can still be `O(b^m)` like DFS.</a:t>
             </a:r>
           </a:p>
         </p:txBody>
@@ -6513,7 +6539,7 @@
           <a:lstStyle/>
           <a:p>
             <a:r>
-              <a:t>Topic 8: DFS (Depth-First Search)</a:t>
+              <a:t>Topic 9: Heuristic Functions for the 8-Puzzle</a:t>
             </a:r>
           </a:p>
         </p:txBody>
@@ -6534,32 +6560,37 @@
           <a:lstStyle/>
           <a:p>
             <a:r>
-              <a:t>This section introduces Depth-First Search (DFS), another fundamental uninformed search algorithm.</a:t>
-            </a:r>
-          </a:p>
-          <a:p>
-            <a:r>
-              <a:t>We will understand how DFS explores the state space by going as deep as possible along each branch before backtracking.</a:t>
-            </a:r>
-          </a:p>
-          <a:p>
-            <a:r>
-              <a:t>Understanding DFS is essential for its unique properties and applications in various computational tasks.</a:t>
-            </a:r>
-          </a:p>
-          <a:p>
-            <a:r>
-              <a:t>The objective is to provide a detailed understanding of DFS's properties, complexity, and practical uses.</a:t>
-            </a:r>
-          </a:p>
-          <a:p>
-            <a:r>
-              <a:t>We'll cover its completeness, optimality, and how its time and space complexity differ from BFS.</a:t>
-            </a:r>
-          </a:p>
-          <a:p>
-            <a:r>
-              <a:t>DFS provides an alternative search strategy, often with different trade-offs in performance.</a:t>
+              <a:t>For the 8-puzzle, common admissible heuristics include:</a:t>
+            </a:r>
+          </a:p>
+          <a:p>
+            <a:r>
+              <a:t>**Manhattan Distance (h1)**: The sum of the horizontal and vertical distances of each tile from its goal position. (e.g., tile 2 is 1 right and 1 down from its goal, so 2 steps).</a:t>
+            </a:r>
+          </a:p>
+          <a:p>
+            <a:r>
+              <a:t>This heuristic is admissible because each move can only reduce the Manhattan distance of one tile by at most 1, and only if that tile is the one being moved towards its goal.</a:t>
+            </a:r>
+          </a:p>
+          <a:p>
+            <a:r>
+              <a:t>**Number of Misplaced Tiles (h2)**: The count of tiles that are not in their correct goal positions (excluding the blank).</a:t>
+            </a:r>
+          </a:p>
+          <a:p>
+            <a:r>
+              <a:t>This is also admissible because each move can correct at most one misplaced tile, so the number of moves needed is at least the number of misplaced tiles.</a:t>
+            </a:r>
+          </a:p>
+          <a:p>
+            <a:r>
+              <a:t>Typically, `h1` (Manhattan Distance) is a stronger heuristic than `h2` (Misplaced Tiles) because it provides a more accurate estimate of the remaining cost.</a:t>
+            </a:r>
+          </a:p>
+          <a:p>
+            <a:r>
+              <a:t>A stronger heuristic prunes the search space more effectively, leading to fewer nodes expanded.</a:t>
             </a:r>
           </a:p>
         </p:txBody>
@@ -6598,7 +6629,7 @@
           <a:lstStyle/>
           <a:p>
             <a:r>
-              <a:t>DFS Algorithm Overview</a:t>
+              <a:t>Topic 9: Designing Heuristics and Trade-offs</a:t>
             </a:r>
           </a:p>
         </p:txBody>
@@ -6619,32 +6650,32 @@
           <a:lstStyle/>
           <a:p>
             <a:r>
-              <a:t>Depth-First Search (DFS) is an algorithm for traversing or searching tree or graph data structures.</a:t>
-            </a:r>
-          </a:p>
-          <a:p>
-            <a:r>
-              <a:t>It explores as far as possible along each branch before backtracking. It essentially goes 'deep' into one path first.</a:t>
-            </a:r>
-          </a:p>
-          <a:p>
-            <a:r>
-              <a:t>If it hits a dead end or a node that has no further unvisited children, it backtracks to the most recent node it hasn't fully explored.</a:t>
-            </a:r>
-          </a:p>
-          <a:p>
-            <a:r>
-              <a:t>DFS typically uses a Stack data structure (or implicitly, recursion) to manage the order of node expansion, ensuring LIFO (Last-In, First-Out) processing.</a:t>
-            </a:r>
-          </a:p>
-          <a:p>
-            <a:r>
-              <a:t>Unlike BFS, DFS does not guarantee finding the shortest path, even in unweighted graphs, as it might explore a very long path to a goal first.</a:t>
-            </a:r>
-          </a:p>
-          <a:p>
-            <a:r>
-              <a:t>It's particularly useful when the solution depth is unknown or when memory is a critical constraint.</a:t>
+              <a:t>Heuristics can be derived from relaxed versions of the original problem, where some constraints are removed to make the problem easier to solve.</a:t>
+            </a:r>
+          </a:p>
+          <a:p>
+            <a:r>
+              <a:t>The cost of solving the relaxed problem then serves as an admissible heuristic for the original problem.</a:t>
+            </a:r>
+          </a:p>
+          <a:p>
+            <a:r>
+              <a:t>Another approach is to learn heuristics from experience, using machine learning techniques to predict the remaining cost.</a:t>
+            </a:r>
+          </a:p>
+          <a:p>
+            <a:r>
+              <a:t>The effectiveness of a heuristic search algorithm largely depends on the quality of its heuristic function.</a:t>
+            </a:r>
+          </a:p>
+          <a:p>
+            <a:r>
+              <a:t>A **good heuristic** should be easy to compute and accurately estimate the cost to the goal. A heuristic that is too computationally expensive might negate its benefits.</a:t>
+            </a:r>
+          </a:p>
+          <a:p>
+            <a:r>
+              <a:t>There is a trade-off between the 'informedness' of a heuristic (how accurate it is) and the computational cost of evaluating it.</a:t>
             </a:r>
           </a:p>
         </p:txBody>
@@ -6683,7 +6714,7 @@
           <a:lstStyle/>
           <a:p>
             <a:r>
-              <a:t>DFS Pseudocode/Steps</a:t>
+              <a:t>Topic 10: A* Algorithm - Introduction</a:t>
             </a:r>
           </a:p>
         </p:txBody>
@@ -6704,47 +6735,32 @@
           <a:lstStyle/>
           <a:p>
             <a:r>
-              <a:t>1. Initialize a Stack with the initial state (node) and a set to keep track of visited states.</a:t>
-            </a:r>
-          </a:p>
-          <a:p>
-            <a:r>
-              <a:t>2. Mark the initial state as visited.</a:t>
-            </a:r>
-          </a:p>
-          <a:p>
-            <a:r>
-              <a:t>3. While the Stack is not empty:</a:t>
-            </a:r>
-          </a:p>
-          <a:p>
-            <a:r>
-              <a:t>4. Pop the top node from the Stack (let's call it current_node).</a:t>
-            </a:r>
-          </a:p>
-          <a:p>
-            <a:r>
-              <a:t>5. If current_node is the goal state, then a solution has been found. Reconstruct and return the path.</a:t>
-            </a:r>
-          </a:p>
-          <a:p>
-            <a:r>
-              <a:t>6. For each unvisited neighbor (successor state) of current_node (often in reverse order of generation for consistent traversal):</a:t>
-            </a:r>
-          </a:p>
-          <a:p>
-            <a:r>
-              <a:t>7. Mark the neighbor as visited and Push it onto the Stack.</a:t>
-            </a:r>
-          </a:p>
-          <a:p>
-            <a:r>
-              <a:t>Recursive implementation of DFS naturally handles the stack management and backtracking.</a:t>
-            </a:r>
-          </a:p>
-          <a:p>
-            <a:r>
-              <a:t>Care must be taken to handle cycles in graphs to prevent infinite loops by maintaining a 'visited' set.</a:t>
+              <a:t>The A* (pronounced 'A-star') algorithm is one of the most widely used and effective heuristic search algorithms.</a:t>
+            </a:r>
+          </a:p>
+          <a:p>
+            <a:r>
+              <a:t>It combines the best features of Uniform-Cost Search (which is optimal and complete) and Greedy Best-First Search (which is often fast but not optimal).</a:t>
+            </a:r>
+          </a:p>
+          <a:p>
+            <a:r>
+              <a:t>A* evaluates nodes using an evaluation function `f(n) = g(n) + h(n)`.</a:t>
+            </a:r>
+          </a:p>
+          <a:p>
+            <a:r>
+              <a:t>`g(n)` is the cost of the path from the initial state to node `n`.</a:t>
+            </a:r>
+          </a:p>
+          <a:p>
+            <a:r>
+              <a:t>`h(n)` is the estimated cost of the cheapest path from node `n` to the goal state (the heuristic function).</a:t>
+            </a:r>
+          </a:p>
+          <a:p>
+            <a:r>
+              <a:t>A* expands the node `n` with the lowest `f(n)` value in its `open list` (fringe), using a priority queue.</a:t>
             </a:r>
           </a:p>
         </p:txBody>
@@ -6783,7 +6799,7 @@
           <a:lstStyle/>
           <a:p>
             <a:r>
-              <a:t>DFS Properties (Completeness &amp; Optimality)</a:t>
+              <a:t>Topic 10: A* Properties: Completeness</a:t>
             </a:r>
           </a:p>
         </p:txBody>
@@ -6804,32 +6820,32 @@
           <a:lstStyle/>
           <a:p>
             <a:r>
-              <a:t>Completeness: DFS is not complete for graphs with cycles or infinite depth. If a goal is not reachable or the search gets stuck in a cycle, it might never terminate.</a:t>
-            </a:r>
-          </a:p>
-          <a:p>
-            <a:r>
-              <a:t>To ensure completeness in graphs, a visited set is crucial to prevent revisiting nodes and falling into infinite loops.</a:t>
-            </a:r>
-          </a:p>
-          <a:p>
-            <a:r>
-              <a:t>When a depth limit (Depth-Limited Search) is imposed, DFS can be complete within that limit.</a:t>
-            </a:r>
-          </a:p>
-          <a:p>
-            <a:r>
-              <a:t>Optimality: DFS is generally not optimal. Even if it finds a solution, there's no guarantee it's the shortest or lowest-cost path.</a:t>
-            </a:r>
-          </a:p>
-          <a:p>
-            <a:r>
-              <a:t>It might discover a deep, suboptimal solution before finding a shallower, optimal one.</a:t>
-            </a:r>
-          </a:p>
-          <a:p>
-            <a:r>
-              <a:t>This makes DFS less suitable for problems where path optimality is a primary concern without further modifications (e.g., iterative deepening).</a:t>
+              <a:t>**Completeness**: A* is complete, provided that the branching factor `b` is finite, step costs are positive, and the heuristic function `h(n)` is admissible (or `h(n) &lt;= h*(n)`).</a:t>
+            </a:r>
+          </a:p>
+          <a:p>
+            <a:r>
+              <a:t>The positive step cost condition ensures that `g(n)` monotonically increases, guaranteeing that A* won't get stuck exploring an infinitely deep path with finite cost.</a:t>
+            </a:r>
+          </a:p>
+          <a:p>
+            <a:r>
+              <a:t>If `h(n)` is not admissible (overestimates costs), A* may prune away the optimal path, making it incomplete in finding optimal solutions.</a:t>
+            </a:r>
+          </a:p>
+          <a:p>
+            <a:r>
+              <a:t>As long as there is a solution and the conditions hold, A* will eventually find it.</a:t>
+            </a:r>
+          </a:p>
+          <a:p>
+            <a:r>
+              <a:t>This makes A* a robust choice for many pathfinding problems.</a:t>
+            </a:r>
+          </a:p>
+          <a:p>
+            <a:r>
+              <a:t>In practice, for graphs, a `closed list` is used to prevent cycles and handle re-visiting states efficiently.</a:t>
             </a:r>
           </a:p>
         </p:txBody>
@@ -6868,7 +6884,7 @@
           <a:lstStyle/>
           <a:p>
             <a:r>
-              <a:t>DFS Complexity Analysis</a:t>
+              <a:t>Topic 10: A* Properties: Optimality</a:t>
             </a:r>
           </a:p>
         </p:txBody>
@@ -6889,32 +6905,32 @@
           <a:lstStyle/>
           <a:p>
             <a:r>
-              <a:t>Time Complexity: O(b^m), where 'b' is the branching factor and 'm' is the maximum depth of the search space (which can be infinite).</a:t>
-            </a:r>
-          </a:p>
-          <a:p>
-            <a:r>
-              <a:t>In the worst case, DFS might explore the entire search space down to its maximum depth.</a:t>
-            </a:r>
-          </a:p>
-          <a:p>
-            <a:r>
-              <a:t>If the search space is finite and without cycles (like a finite tree), time complexity is proportional to the number of nodes in the tree.</a:t>
-            </a:r>
-          </a:p>
-          <a:p>
-            <a:r>
-              <a:t>Space Complexity: O(b*m). This is a significant advantage over BFS.</a:t>
-            </a:r>
-          </a:p>
-          <a:p>
-            <a:r>
-              <a:t>DFS only needs to store the current path from the root to the current node and the unexpanded siblings for backtracking.</a:t>
-            </a:r>
-          </a:p>
-          <a:p>
-            <a:r>
-              <a:t>This makes DFS highly memory-efficient, especially for problems with very deep solutions but limited branching.</a:t>
+              <a:t>**Optimality**: A* is optimal if its heuristic function `h(n)` is admissible (never overestimates the cost to the goal).</a:t>
+            </a:r>
+          </a:p>
+          <a:p>
+            <a:r>
+              <a:t>Additionally, if A* uses a `closed list` and the heuristic is consistent (a stronger condition than admissibility), then A* is optimal without needing to re-expand nodes.</a:t>
+            </a:r>
+          </a:p>
+          <a:p>
+            <a:r>
+              <a:t>A consistent heuristic ensures that `f(n)` values along any path are non-decreasing, guaranteeing that the first time A* finds a path to a node, it is the optimal path to that node.</a:t>
+            </a:r>
+          </a:p>
+          <a:p>
+            <a:r>
+              <a:t>This property is crucial for many practical applications, ensuring that the best possible solution is found.</a:t>
+            </a:r>
+          </a:p>
+          <a:p>
+            <a:r>
+              <a:t>If `h(n)` is admissible but not consistent, A* can still be optimal but might need to re-expand nodes if a cheaper path to an already visited node is found.</a:t>
+            </a:r>
+          </a:p>
+          <a:p>
+            <a:r>
+              <a:t>The balance between `g(n)` (known cost) and `h(n)` (estimated cost) allows A* to efficiently balance exploring promising paths with ensuring overall optimality.</a:t>
             </a:r>
           </a:p>
         </p:txBody>
@@ -6953,7 +6969,7 @@
           <a:lstStyle/>
           <a:p>
             <a:r>
-              <a:t>Birth of AI: The Dartmouth Conference (1956)</a:t>
+              <a:t>Topic 1: AI Winters and Expert Systems (1970s-1990s)</a:t>
             </a:r>
           </a:p>
         </p:txBody>
@@ -6974,32 +6990,32 @@
           <a:lstStyle/>
           <a:p>
             <a:r>
-              <a:t>The term 'Artificial Intelligence' was coined by John McCarthy in 1955, proposing the Dartmouth Summer Research Project on Artificial Intelligence in 1956.</a:t>
-            </a:r>
-          </a:p>
-          <a:p>
-            <a:r>
-              <a:t>This seminal workshop brought together pioneers like Marvin Minsky, Nathaniel Rochester, Claude Shannon, and Herbert A. Simon.</a:t>
-            </a:r>
-          </a:p>
-          <a:p>
-            <a:r>
-              <a:t>The conference's proposal stated the premise that 'every aspect of learning or any other feature of intelligence can in principle be so precisely described that a machine can be made to simulate it.'</a:t>
-            </a:r>
-          </a:p>
-          <a:p>
-            <a:r>
-              <a:t>Early achievements included Allen Newell and Herbert Simon's Logic Theorist (1956), which proved theorems from Principia Mathematica.</a:t>
-            </a:r>
-          </a:p>
-          <a:p>
-            <a:r>
-              <a:t>Other early systems included Samuel's checkers player (1959) and Gelernter's Geometry Theorem Prover (1959), showcasing early problem-solving capabilities.</a:t>
-            </a:r>
-          </a:p>
-          <a:p>
-            <a:r>
-              <a:t>The initial optimism fueled significant research and funding into the new field.</a:t>
+              <a:t>The first 'AI winter' occurred in the mid-1970s due to unrealistic expectations, limited computational power, and the failure of AI to scale beyond 'toy' problems.</a:t>
+            </a:r>
+          </a:p>
+          <a:p>
+            <a:r>
+              <a:t>Despite setbacks, the 1980s saw a resurgence with 'expert systems', which encoded human expert knowledge into rule-based programs for specific domains.</a:t>
+            </a:r>
+          </a:p>
+          <a:p>
+            <a:r>
+              <a:t>DENDRAL (1965) and MYCIN (1972) were pioneering expert systems for chemical structure identification and medical diagnosis, respectively, achieving expert-level performance.</a:t>
+            </a:r>
+          </a:p>
+          <a:p>
+            <a:r>
+              <a:t>The commercial success of expert systems, particularly XCON (R1) for configuring DEC computer systems, temporarily revitalized interest and investment in AI.</a:t>
+            </a:r>
+          </a:p>
+          <a:p>
+            <a:r>
+              <a:t>However, the brittle nature of expert systems (difficulty in acquiring knowledge, lack of common sense, poor handling of uncertainty) led to another 'AI winter' in the late 1980s.</a:t>
+            </a:r>
+          </a:p>
+          <a:p>
+            <a:r>
+              <a:t>During this period, focus shifted towards more robust, sub-symbolic approaches and probabilistic methods, laying groundwork for machine learning.</a:t>
             </a:r>
           </a:p>
         </p:txBody>
@@ -7038,7 +7054,7 @@
           <a:lstStyle/>
           <a:p>
             <a:r>
-              <a:t>DFS Applications</a:t>
+              <a:t>Topic 10: A* Properties: Time and Space Complexity</a:t>
             </a:r>
           </a:p>
         </p:txBody>
@@ -7059,32 +7075,122 @@
           <a:lstStyle/>
           <a:p>
             <a:r>
-              <a:t>Topological Sorting: Ordering nodes in a directed acyclic graph (DAG) such that for every directed edge (u, v), u comes before v. Essential for task scheduling.</a:t>
-            </a:r>
-          </a:p>
-          <a:p>
-            <a:r>
-              <a:t>Finding Connected Components: Identifying all reachable nodes from a given starting node in a graph.</a:t>
-            </a:r>
-          </a:p>
-          <a:p>
-            <a:r>
-              <a:t>Cycle Detection: Detecting the presence of cycles in a graph, which is important in various network and dependency analyses.</a:t>
-            </a:r>
-          </a:p>
-          <a:p>
-            <a:r>
-              <a:t>Maze Solving: DFS can be used to find a path through a maze by exploring one path fully before backtracking.</a:t>
-            </a:r>
-          </a:p>
-          <a:p>
-            <a:r>
-              <a:t>Pathfinding (when solution depth is unknown and memory is constrained): Although not optimal, it's efficient in memory.</a:t>
-            </a:r>
-          </a:p>
-          <a:p>
-            <a:r>
-              <a:t>Solving puzzles: Certain puzzles like Sudoku solvers or constraint satisfaction problems can leverage DFS-like backtracking search.</a:t>
+              <a:t>**Time Complexity**: The time complexity of A* is highly dependent on the quality of the heuristic function.</a:t>
+            </a:r>
+          </a:p>
+          <a:p>
+            <a:r>
+              <a:t>In the worst case (e.g., if `h(n)=0`, A* degenerates to Uniform-Cost Search), it can be exponential, `O(b^d)`.</a:t>
+            </a:r>
+          </a:p>
+          <a:p>
+            <a:r>
+              <a:t>With a sufficiently good heuristic, A* can be much faster, approaching `O(d)` or even `O(log d)` in some specific cases, effectively pruning a vast portion of the search space.</a:t>
+            </a:r>
+          </a:p>
+          <a:p>
+            <a:r>
+              <a:t>**Space Complexity**: Like BFS, A* stores all generated nodes in the `open list` and `closed list`.</a:t>
+            </a:r>
+          </a:p>
+          <a:p>
+            <a:r>
+              <a:t>Therefore, its space complexity is also exponential, `O(b^d)`, in the worst case.</a:t>
+            </a:r>
+          </a:p>
+          <a:p>
+            <a:r>
+              <a:t>This is the primary practical limitation of A* for problems with extremely large or deep search spaces, even with a good heuristic.</a:t>
+            </a:r>
+          </a:p>
+          <a:p>
+            <a:r>
+              <a:t>Variants like Iterative Deepening A* (IDA*) or Simplified Memory-bounded A* (SMA*) address the space complexity at the cost of potential re-computation or sub-optimality.</a:t>
+            </a:r>
+          </a:p>
+        </p:txBody>
+      </p:sp>
+    </p:spTree>
+  </p:cSld>
+  <p:clrMapOvr>
+    <a:masterClrMapping/>
+  </p:clrMapOvr>
+</p:sld>
+</file>
+
+<file path=ppt/slides/slide51.xml><?xml version="1.0" encoding="utf-8"?>
+<p:sld xmlns:a="http://schemas.openxmlformats.org/drawingml/2006/main" xmlns:p="http://schemas.openxmlformats.org/presentationml/2006/main" xmlns:r="http://schemas.openxmlformats.org/officeDocument/2006/relationships">
+  <p:cSld>
+    <p:spTree>
+      <p:nvGrpSpPr>
+        <p:cNvPr id="1" name=""/>
+        <p:cNvGrpSpPr/>
+        <p:nvPr/>
+      </p:nvGrpSpPr>
+      <p:grpSpPr/>
+      <p:sp>
+        <p:nvSpPr>
+          <p:cNvPr id="2" name="Title 1"/>
+          <p:cNvSpPr>
+            <a:spLocks noGrp="1"/>
+          </p:cNvSpPr>
+          <p:nvPr>
+            <p:ph type="title"/>
+          </p:nvPr>
+        </p:nvSpPr>
+        <p:spPr/>
+        <p:txBody>
+          <a:bodyPr/>
+          <a:lstStyle/>
+          <a:p>
+            <a:r>
+              <a:t>Topic 10: A* Example and Use Cases</a:t>
+            </a:r>
+          </a:p>
+        </p:txBody>
+      </p:sp>
+      <p:sp>
+        <p:nvSpPr>
+          <p:cNvPr id="3" name="Content Placeholder 2"/>
+          <p:cNvSpPr>
+            <a:spLocks noGrp="1"/>
+          </p:cNvSpPr>
+          <p:nvPr>
+            <p:ph idx="1"/>
+          </p:nvPr>
+        </p:nvSpPr>
+        <p:spPr/>
+        <p:txBody>
+          <a:bodyPr/>
+          <a:lstStyle/>
+          <a:p>
+            <a:r>
+              <a:t>**Example: Pathfinding in a Grid Map (e.g., video games, robotics navigation)**: Given a grid with obstacles and varying terrain costs, A* finds the shortest path.</a:t>
+            </a:r>
+          </a:p>
+          <a:p>
+            <a:r>
+              <a:t>Here, `g(n)` is the actual distance traveled from the start, and `h(n)` can be Manhattan distance or Euclidean distance to the goal (admissible).</a:t>
+            </a:r>
+          </a:p>
+          <a:p>
+            <a:r>
+              <a:t>**Applications**: Route planning (GPS navigation), network routing, shortest path in games, sequence alignment in bioinformatics, industrial robotics planning.</a:t>
+            </a:r>
+          </a:p>
+          <a:p>
+            <a:r>
+              <a:t>A* is the algorithm of choice for many pathfinding scenarios where an optimal path is required and a good admissible heuristic can be designed.</a:t>
+            </a:r>
+          </a:p>
+          <a:p>
+            <a:r>
+              <a:t>It is a cornerstone algorithm in AI and computer science due to its balance of completeness, optimality, and practical efficiency with effective heuristics.</a:t>
+            </a:r>
+          </a:p>
+          <a:p>
+            <a:r>
+              <a:t>The widespread use of A* underscores the power of informed search in tackling complex computational problems.</a:t>
             </a:r>
           </a:p>
         </p:txBody>
@@ -7123,7 +7229,7 @@
           <a:lstStyle/>
           <a:p>
             <a:r>
-              <a:t>AI Winters and Resurgence</a:t>
+              <a:t>Topic 1: Modern AI: Machine Learning, Big Data, and Deep Learning (1990s-Present)</a:t>
             </a:r>
           </a:p>
         </p:txBody>
@@ -7144,32 +7250,32 @@
           <a:lstStyle/>
           <a:p>
             <a:r>
-              <a:t>The initial optimism of the 1950s and 60s faced significant challenges, leading to 'AI winters' where funding and interest diminished.</a:t>
-            </a:r>
-          </a:p>
-          <a:p>
-            <a:r>
-              <a:t>Limitations in computational power, knowledge representation, and the inherent difficulty of scaling early AI approaches became apparent.</a:t>
-            </a:r>
-          </a:p>
-          <a:p>
-            <a:r>
-              <a:t>Major setbacks included Lighthill's report (1973) critiquing AI's progress and the collapse of the ALPAC report (1966) on machine translation.</a:t>
-            </a:r>
-          </a:p>
-          <a:p>
-            <a:r>
-              <a:t>A resurgence occurred in the 1980s with 'Expert Systems' which codified human knowledge into rules, successfully applied in domains like medicine (MYCIN) and geology (PROSPECTOR).</a:t>
-            </a:r>
-          </a:p>
-          <a:p>
-            <a:r>
-              <a:t>The expert system boom was followed by another 'AI winter' due to high development and maintenance costs, and difficulties in acquiring tacit knowledge.</a:t>
-            </a:r>
-          </a:p>
-          <a:p>
-            <a:r>
-              <a:t>The late 1990s and 2000s saw renewed interest with advancements in statistical machine learning, data availability, and increased computational power.</a:t>
+              <a:t>The late 20th and early 21st centuries witnessed a significant shift towards data-driven and statistical AI, driven by advancements in machine learning (ML).</a:t>
+            </a:r>
+          </a:p>
+          <a:p>
+            <a:r>
+              <a:t>Increased computational power (Moore's Law), availability of vast datasets ('Big Data'), and new algorithms (e.g., Support Vector Machines, Boosting) propelled ML forward.</a:t>
+            </a:r>
+          </a:p>
+          <a:p>
+            <a:r>
+              <a:t>Deep Learning, a subfield of ML using artificial neural networks with multiple layers, revolutionized areas like computer vision and natural language processing.</a:t>
+            </a:r>
+          </a:p>
+          <a:p>
+            <a:r>
+              <a:t>Breakthroughs like AlexNet in 2012 for image recognition demonstrated the unprecedented capabilities of deep neural networks.</a:t>
+            </a:r>
+          </a:p>
+          <a:p>
+            <a:r>
+              <a:t>Current AI encompasses a wide range of techniques, including reinforcement learning, evolutionary computation, and probabilistic graphical models.</a:t>
+            </a:r>
+          </a:p>
+          <a:p>
+            <a:r>
+              <a:t>The rise of AI has had profound impacts across industries, leading to new products, services, and ethical considerations regarding its societal implications.</a:t>
             </a:r>
           </a:p>
         </p:txBody>
@@ -7208,7 +7314,7 @@
           <a:lstStyle/>
           <a:p>
             <a:r>
-              <a:t>Modern AI: Deep Learning &amp; Big Data Era</a:t>
+              <a:t>Topic 2: Applications of AI - Overview</a:t>
             </a:r>
           </a:p>
         </p:txBody>
@@ -7229,32 +7335,32 @@
           <a:lstStyle/>
           <a:p>
             <a:r>
-              <a:t>The 21st century marks a golden age for AI, driven by massive datasets ('Big Data'), powerful computational resources (GPUs), and sophisticated algorithms.</a:t>
-            </a:r>
-          </a:p>
-          <a:p>
-            <a:r>
-              <a:t>Machine Learning (ML), particularly Deep Learning (DL) with neural networks, has become a dominant paradigm, achieving breakthroughs in various fields.</a:t>
-            </a:r>
-          </a:p>
-          <a:p>
-            <a:r>
-              <a:t>Key milestones include AlphaGo defeating the world champion in Go (2016), demonstrating advanced strategic reasoning.</a:t>
-            </a:r>
-          </a:p>
-          <a:p>
-            <a:r>
-              <a:t>Progress in natural language processing (e.g., Transformers, LLMs like GPT) and computer vision (e.g., ImageNet, CNNs) has been transformative.</a:t>
-            </a:r>
-          </a:p>
-          <a:p>
-            <a:r>
-              <a:t>AI is now embedded in everyday technology, from virtual assistants to personalized recommendations and autonomous vehicles.</a:t>
-            </a:r>
-          </a:p>
-          <a:p>
-            <a:r>
-              <a:t>Current research focuses on ethical AI, explainable AI (XAI), transfer learning, reinforcement learning, and general artificial intelligence (AGI).</a:t>
+              <a:t>Artificial Intelligence has permeated nearly every sector, transforming how businesses operate and how individuals interact with technology.</a:t>
+            </a:r>
+          </a:p>
+          <a:p>
+            <a:r>
+              <a:t>AI applications can be broadly categorized into domains such as Natural Language Processing, Computer Vision, Robotics, Expert Systems, and Machine Learning-driven analytics.</a:t>
+            </a:r>
+          </a:p>
+          <a:p>
+            <a:r>
+              <a:t>These applications leverage AI to automate tasks, make predictions, personalize experiences, optimize operations, and gain insights from vast amounts of data.</a:t>
+            </a:r>
+          </a:p>
+          <a:p>
+            <a:r>
+              <a:t>The versatility of AI allows it to solve problems ranging from mundane data entry to complex scientific discovery.</a:t>
+            </a:r>
+          </a:p>
+          <a:p>
+            <a:r>
+              <a:t>Understanding the breadth of AI applications provides context for the theoretical concepts and highlights the practical impact of the field.</a:t>
+            </a:r>
+          </a:p>
+          <a:p>
+            <a:r>
+              <a:t>Many modern technologies, from smartphone features to industrial automation, are powered by sophisticated AI algorithms.</a:t>
             </a:r>
           </a:p>
         </p:txBody>
@@ -7293,7 +7399,7 @@
           <a:lstStyle/>
           <a:p>
             <a:r>
-              <a:t>Topic 2: Applications of AI</a:t>
+              <a:t>Topic 2: Natural Language Processing (NLP)</a:t>
             </a:r>
           </a:p>
         </p:txBody>
@@ -7314,32 +7420,32 @@
           <a:lstStyle/>
           <a:p>
             <a:r>
-              <a:t>This section explores the diverse and impactful applications of Artificial Intelligence across various industries and domains.</a:t>
-            </a:r>
-          </a:p>
-          <a:p>
-            <a:r>
-              <a:t>We will examine how AI systems are designed to solve real-world problems, enhance efficiency, and create new capabilities.</a:t>
-            </a:r>
-          </a:p>
-          <a:p>
-            <a:r>
-              <a:t>Understanding these applications provides practical context to the theoretical concepts of AI.</a:t>
-            </a:r>
-          </a:p>
-          <a:p>
-            <a:r>
-              <a:t>The objective is to illustrate the pervasive nature of AI in modern society and its potential for future innovation.</a:t>
-            </a:r>
-          </a:p>
-          <a:p>
-            <a:r>
-              <a:t>We will categorize applications into key areas such as NLP, Computer Vision, Robotics, and Decision Support.</a:t>
-            </a:r>
-          </a:p>
-          <a:p>
-            <a:r>
-              <a:t>This topic highlights the tangible benefits and transformative power of AI technologies.</a:t>
+              <a:t>Natural Language Processing (NLP) enables computers to understand, interpret, and generate human language in a valuable way.</a:t>
+            </a:r>
+          </a:p>
+          <a:p>
+            <a:r>
+              <a:t>Key NLP tasks include machine translation (e.g., Google Translate), sentiment analysis (determining emotional tone in text), and text summarization.</a:t>
+            </a:r>
+          </a:p>
+          <a:p>
+            <a:r>
+              <a:t>Chatbots and virtual assistants (e.g., Siri, Alexa, Google Assistant) are prominent examples, allowing users to interact with computers using natural speech or text.</a:t>
+            </a:r>
+          </a:p>
+          <a:p>
+            <a:r>
+              <a:t>Information retrieval and extraction systems use NLP to find relevant information from large text corpora and extract specific entities or facts.</a:t>
+            </a:r>
+          </a:p>
+          <a:p>
+            <a:r>
+              <a:t>Modern NLP utilizes deep learning models like transformers (e.g., BERT, GPT-3) to achieve state-of-the-art performance across various linguistic tasks.</a:t>
+            </a:r>
+          </a:p>
+          <a:p>
+            <a:r>
+              <a:t>Applications extend to content moderation, spam filtering, legal document analysis, and generating creative content like news articles or poetry.</a:t>
             </a:r>
           </a:p>
         </p:txBody>
@@ -7378,7 +7484,7 @@
           <a:lstStyle/>
           <a:p>
             <a:r>
-              <a:t>Overview of AI Applications</a:t>
+              <a:t>Topic 2: Computer Vision</a:t>
             </a:r>
           </a:p>
         </p:txBody>
@@ -7399,32 +7505,32 @@
           <a:lstStyle/>
           <a:p>
             <a:r>
-              <a:t>AI applications span nearly every sector, revolutionizing industries from healthcare and finance to transportation and entertainment.</a:t>
-            </a:r>
-          </a:p>
-          <a:p>
-            <a:r>
-              <a:t>They often involve tasks that traditionally required human intelligence, such as pattern recognition, decision-making, and understanding language.</a:t>
-            </a:r>
-          </a:p>
-          <a:p>
-            <a:r>
-              <a:t>Common categories include natural language processing, computer vision, robotics, expert systems, and predictive analytics.</a:t>
-            </a:r>
-          </a:p>
-          <a:p>
-            <a:r>
-              <a:t>AI is used for automation, optimization, personalization, and gaining insights from complex data.</a:t>
-            </a:r>
-          </a:p>
-          <a:p>
-            <a:r>
-              <a:t>The increasing availability of data and computational power continues to expand the scope and effectiveness of AI solutions.</a:t>
-            </a:r>
-          </a:p>
-          <a:p>
-            <a:r>
-              <a:t>These applications drive economic growth and societal change, fundamentally altering how we interact with technology and the world.</a:t>
+              <a:t>Computer Vision equips machines with the ability to 'see' and interpret visual information from images and videos, akin to human sight.</a:t>
+            </a:r>
+          </a:p>
+          <a:p>
+            <a:r>
+              <a:t>Core tasks include object detection (identifying objects within an image), image classification (categorizing entire images), and facial recognition.</a:t>
+            </a:r>
+          </a:p>
+          <a:p>
+            <a:r>
+              <a:t>Applications are widespread: autonomous vehicles use vision for navigation, obstacle avoidance, and traffic sign recognition.</a:t>
+            </a:r>
+          </a:p>
+          <a:p>
+            <a:r>
+              <a:t>In healthcare, computer vision aids in medical image analysis for disease detection (e.g., tumors in X-rays, diabetic retinopathy), improving diagnostic accuracy.</a:t>
+            </a:r>
+          </a:p>
+          <a:p>
+            <a:r>
+              <a:t>Security and surveillance systems employ facial recognition and behavior analysis to monitor premises and identify individuals.</a:t>
+            </a:r>
+          </a:p>
+          <a:p>
+            <a:r>
+              <a:t>Other uses include quality control in manufacturing, augmented reality experiences, agricultural monitoring, and content recommendation based on visual preferences.</a:t>
             </a:r>
           </a:p>
         </p:txBody>
